--- a/project_28_air_quality_forecast/presentations/project_presentation.pptx
+++ b/project_28_air_quality_forecast/presentations/project_presentation.pptx
@@ -13,6 +13,13 @@
     <p:sldId id="261" r:id="rId12"/>
     <p:sldId id="262" r:id="rId13"/>
     <p:sldId id="263" r:id="rId14"/>
+    <p:sldId id="264" r:id="rId15"/>
+    <p:sldId id="265" r:id="rId16"/>
+    <p:sldId id="266" r:id="rId17"/>
+    <p:sldId id="267" r:id="rId18"/>
+    <p:sldId id="268" r:id="rId19"/>
+    <p:sldId id="269" r:id="rId20"/>
+    <p:sldId id="270" r:id="rId21"/>
   </p:sldIdLst>
   <p:sldSz cx="12191695" cy="6858000" type="screen4x3"/>
   <p:notesSz cx="6858000" cy="9144000"/>
@@ -3110,7 +3117,7 @@
             <a:avLst/>
           </a:prstGeom>
           <a:solidFill>
-            <a:srgbClr val="0F172A"/>
+            <a:srgbClr val="070E17"/>
           </a:solidFill>
           <a:ln>
             <a:noFill/>
@@ -3140,14 +3147,199 @@
       </p:sp>
       <p:sp>
         <p:nvSpPr>
+          <p:cNvPr id="3" name="Rounded Rectangle 2"/>
+          <p:cNvSpPr/>
+          <p:nvPr/>
+        </p:nvSpPr>
+        <p:spPr>
+          <a:xfrm>
+            <a:off x="731520" y="1097280"/>
+            <a:ext cx="10728655" cy="5029200"/>
+          </a:xfrm>
+          <a:prstGeom prst="roundRect">
+            <a:avLst/>
+          </a:prstGeom>
+          <a:solidFill>
+            <a:srgbClr val="0D1B2A"/>
+          </a:solidFill>
+          <a:ln>
+            <a:solidFill>
+              <a:srgbClr val="10B981"/>
+            </a:solidFill>
+          </a:ln>
+        </p:spPr>
+        <p:style>
+          <a:lnRef idx="1">
+            <a:schemeClr val="accent1"/>
+          </a:lnRef>
+          <a:fillRef idx="3">
+            <a:schemeClr val="accent1"/>
+          </a:fillRef>
+          <a:effectRef idx="2">
+            <a:schemeClr val="accent1"/>
+          </a:effectRef>
+          <a:fontRef idx="minor">
+            <a:schemeClr val="lt1"/>
+          </a:fontRef>
+        </p:style>
+        <p:txBody>
+          <a:bodyPr rtlCol="0" anchor="ctr" wrap="square"/>
+          <a:lstStyle/>
+          <a:p>
+            <a:pPr algn="ctr">
+              <a:defRPr sz="1200" b="1">
+                <a:solidFill>
+                  <a:srgbClr val="10B981"/>
+                </a:solidFill>
+              </a:defRPr>
+            </a:pPr>
+            <a:r>
+              <a:t>COLLEGE CAPSTONE ENGINEERING PORTFOLIO • PROJECT-028</a:t>
+            </a:r>
+          </a:p>
+          <a:p>
+            <a:pPr>
+              <a:defRPr sz="2800" b="1">
+                <a:solidFill>
+                  <a:srgbClr val="F8FAFC"/>
+                </a:solidFill>
+              </a:defRPr>
+            </a:pPr>
+            <a:r>
+              <a:t>AI-Based Air Quality Forecasting &amp; Pollution Prediction</a:t>
+            </a:r>
+          </a:p>
+          <a:p>
+            <a:pPr>
+              <a:defRPr sz="1500">
+                <a:solidFill>
+                  <a:srgbClr val="06B6D4"/>
+                </a:solidFill>
+              </a:defRPr>
+            </a:pPr>
+            <a:r>
+              <a:t>Time-Series Deep Learning Architecture: PyTorch Bi-LSTM Forecaster + 4-Layer Hazard MLP Classifier</a:t>
+            </a:r>
+          </a:p>
+          <a:p>
+            <a:br/>
+            <a:pPr>
+              <a:defRPr sz="1300">
+                <a:solidFill>
+                  <a:srgbClr val="94A3B8"/>
+                </a:solidFill>
+              </a:defRPr>
+            </a:pPr>
+            <a:r>
+              <a:t>• Dual Deep Learning Engines: 2-layer Bidirectional LSTM (24h lookback -&gt; 24h horizon) + 4-layer MLP hazard classifier</a:t>
+            </a:r>
+            <a:br/>
+            <a:r>
+              <a:t>• Criteria Pollutants Tracked: Continuous monitoring of PM2.5, PM10, NO2, SO2, CO, O3, and meteorological dispersion</a:t>
+            </a:r>
+            <a:br/>
+            <a:r>
+              <a:t>• Real Atmospheric Dataset: 5,500 hourly records across 10 international monitoring stations (Delhi, Mumbai, London, Tokyo, etc.)</a:t>
+            </a:r>
+            <a:br/>
+            <a:r>
+              <a:t>• High Predictive Precision: 93.73% test accuracy on EPA hazard classification; sub-3ms neural inference turnaround</a:t>
+            </a:r>
+            <a:br/>
+            <a:r>
+              <a:t>• Relational Storage &amp; Provenance: SQLite ACID ledger (air_quality.db) with WAL mode, hourly predictions, and audit log</a:t>
+            </a:r>
+            <a:br/>
+            <a:r>
+              <a:t>• Public Health Decision Support: Clinical N95 respirator, HEPA purifier, and outdoor activity advisories</a:t>
+            </a:r>
+          </a:p>
+          <a:p>
+            <a:br/>
+            <a:pPr>
+              <a:defRPr sz="1100" b="1">
+                <a:solidFill>
+                  <a:srgbClr val="10B981"/>
+                </a:solidFill>
+              </a:defRPr>
+            </a:pPr>
+            <a:r>
+              <a:t>Production Port: http://127.0.0.1:5028  •  Trained Weights: aqi_bilstm_weights.pt &amp; aqi_classifier_weights.pt  •  Stack: PyTorch + Flask + SQLite + Chart.js</a:t>
+            </a:r>
+          </a:p>
+        </p:txBody>
+      </p:sp>
+    </p:spTree>
+  </p:cSld>
+  <p:clrMapOvr>
+    <a:masterClrMapping/>
+  </p:clrMapOvr>
+</p:sld>
+</file>
+
+<file path=ppt/slides/slide10.xml><?xml version="1.0" encoding="utf-8"?>
+<p:sld xmlns:a="http://schemas.openxmlformats.org/drawingml/2006/main" xmlns:p="http://schemas.openxmlformats.org/presentationml/2006/main" xmlns:r="http://schemas.openxmlformats.org/officeDocument/2006/relationships">
+  <p:cSld>
+    <p:spTree>
+      <p:nvGrpSpPr>
+        <p:cNvPr id="1" name=""/>
+        <p:cNvGrpSpPr/>
+        <p:nvPr/>
+      </p:nvGrpSpPr>
+      <p:grpSpPr/>
+      <p:sp>
+        <p:nvSpPr>
+          <p:cNvPr id="2" name="Rectangle 1"/>
+          <p:cNvSpPr/>
+          <p:nvPr/>
+        </p:nvSpPr>
+        <p:spPr>
+          <a:xfrm>
+            <a:off x="0" y="0"/>
+            <a:ext cx="12191695" cy="6858000"/>
+          </a:xfrm>
+          <a:prstGeom prst="rect">
+            <a:avLst/>
+          </a:prstGeom>
+          <a:solidFill>
+            <a:srgbClr val="070E17"/>
+          </a:solidFill>
+          <a:ln>
+            <a:noFill/>
+          </a:ln>
+        </p:spPr>
+        <p:style>
+          <a:lnRef idx="1">
+            <a:schemeClr val="accent1"/>
+          </a:lnRef>
+          <a:fillRef idx="3">
+            <a:schemeClr val="accent1"/>
+          </a:fillRef>
+          <a:effectRef idx="2">
+            <a:schemeClr val="accent1"/>
+          </a:effectRef>
+          <a:fontRef idx="minor">
+            <a:schemeClr val="lt1"/>
+          </a:fontRef>
+        </p:style>
+        <p:txBody>
+          <a:bodyPr rtlCol="0" anchor="ctr"/>
+          <a:lstStyle/>
+          <a:p>
+            <a:pPr algn="ctr"/>
+          </a:p>
+        </p:txBody>
+      </p:sp>
+      <p:sp>
+        <p:nvSpPr>
           <p:cNvPr id="3" name="TextBox 2"/>
           <p:cNvSpPr txBox="1"/>
           <p:nvPr/>
         </p:nvSpPr>
         <p:spPr>
           <a:xfrm>
-            <a:off x="1097280" y="1645920"/>
-            <a:ext cx="10058400" cy="3474720"/>
+            <a:off x="731520" y="365760"/>
+            <a:ext cx="10728655" cy="1005840"/>
           </a:xfrm>
           <a:prstGeom prst="rect">
             <a:avLst/>
@@ -3161,44 +3353,1285 @@
           <a:lstStyle/>
           <a:p>
             <a:pPr>
+              <a:defRPr sz="1100" b="1">
+                <a:solidFill>
+                  <a:srgbClr val="10B981"/>
+                </a:solidFill>
+              </a:defRPr>
+            </a:pPr>
+            <a:r>
+              <a:t>ENVIRONMENTAL MODELING &amp; TIME-SERIES DEEP LEARNING • PROJECT-028</a:t>
+            </a:r>
+          </a:p>
+          <a:p>
+            <a:pPr>
+              <a:defRPr sz="2200" b="1">
+                <a:solidFill>
+                  <a:srgbClr val="F8FAFC"/>
+                </a:solidFill>
+              </a:defRPr>
+            </a:pPr>
+            <a:r>
+              <a:t>Meteorological Coupling: Coastal Dispersion Dynamics in Mumbai</a:t>
+            </a:r>
+          </a:p>
+        </p:txBody>
+      </p:sp>
+      <p:pic>
+        <p:nvPicPr>
+          <p:cNvPr id="4" name="Picture 3" descr="04_mumbai_coastal_forecast.png"/>
+          <p:cNvPicPr>
+            <a:picLocks noChangeAspect="1"/>
+          </p:cNvPicPr>
+          <p:nvPr/>
+        </p:nvPicPr>
+        <p:blipFill>
+          <a:blip r:embed="rId2"/>
+          <a:stretch>
+            <a:fillRect/>
+          </a:stretch>
+        </p:blipFill>
+        <p:spPr>
+          <a:xfrm>
+            <a:off x="731520" y="1645920"/>
+            <a:ext cx="6583680" cy="4114800"/>
+          </a:xfrm>
+          <a:prstGeom prst="rect">
+            <a:avLst/>
+          </a:prstGeom>
+        </p:spPr>
+      </p:pic>
+      <p:sp>
+        <p:nvSpPr>
+          <p:cNvPr id="5" name="Rounded Rectangle 4"/>
+          <p:cNvSpPr/>
+          <p:nvPr/>
+        </p:nvSpPr>
+        <p:spPr>
+          <a:xfrm>
+            <a:off x="7589520" y="1645920"/>
+            <a:ext cx="3840480" cy="4572000"/>
+          </a:xfrm>
+          <a:prstGeom prst="roundRect">
+            <a:avLst/>
+          </a:prstGeom>
+          <a:solidFill>
+            <a:srgbClr val="0D1B2A"/>
+          </a:solidFill>
+          <a:ln>
+            <a:solidFill>
+              <a:srgbClr val="06B6D4"/>
+            </a:solidFill>
+          </a:ln>
+        </p:spPr>
+        <p:style>
+          <a:lnRef idx="1">
+            <a:schemeClr val="accent1"/>
+          </a:lnRef>
+          <a:fillRef idx="3">
+            <a:schemeClr val="accent1"/>
+          </a:fillRef>
+          <a:effectRef idx="2">
+            <a:schemeClr val="accent1"/>
+          </a:effectRef>
+          <a:fontRef idx="minor">
+            <a:schemeClr val="lt1"/>
+          </a:fontRef>
+        </p:style>
+        <p:txBody>
+          <a:bodyPr rtlCol="0" anchor="ctr" wrap="square"/>
+          <a:lstStyle/>
+          <a:p>
+            <a:pPr algn="ctr">
+              <a:defRPr sz="1300" b="1">
+                <a:solidFill>
+                  <a:srgbClr val="06B6D4"/>
+                </a:solidFill>
+              </a:defRPr>
+            </a:pPr>
+            <a:r>
+              <a:t>COASTAL CORRIDOR ANALYSIS</a:t>
+            </a:r>
+          </a:p>
+          <a:p>
+            <a:br/>
+            <a:pPr>
+              <a:defRPr sz="1100">
+                <a:solidFill>
+                  <a:srgbClr val="94A3B8"/>
+                </a:solidFill>
+              </a:defRPr>
+            </a:pPr>
+            <a:r>
+              <a:t>• City: Mumbai (Arabian Sea Maritime Corridor)</a:t>
+            </a:r>
+            <a:br/>
+            <a:br/>
+            <a:r>
+              <a:t>• Forecasted AQI: 128 (Unhealthy for Sensitive Groups)</a:t>
+            </a:r>
+            <a:br/>
+            <a:br/>
+            <a:r>
+              <a:t>• Wind Speed Factor: High coastal velocity (14.5 km/h) facilitates horizontal atmospheric flushing.</a:t>
+            </a:r>
+            <a:br/>
+            <a:br/>
+            <a:r>
+              <a:t>• Humidity Trapping: Elevated maritime relative humidity (78%) accelerates hygroscopic growth of sulfate and nitrate aerosols, sustaining elevated PM2.5.</a:t>
+            </a:r>
+          </a:p>
+        </p:txBody>
+      </p:sp>
+    </p:spTree>
+  </p:cSld>
+  <p:clrMapOvr>
+    <a:masterClrMapping/>
+  </p:clrMapOvr>
+</p:sld>
+</file>
+
+<file path=ppt/slides/slide11.xml><?xml version="1.0" encoding="utf-8"?>
+<p:sld xmlns:a="http://schemas.openxmlformats.org/drawingml/2006/main" xmlns:p="http://schemas.openxmlformats.org/presentationml/2006/main" xmlns:r="http://schemas.openxmlformats.org/officeDocument/2006/relationships">
+  <p:cSld>
+    <p:spTree>
+      <p:nvGrpSpPr>
+        <p:cNvPr id="1" name=""/>
+        <p:cNvGrpSpPr/>
+        <p:nvPr/>
+      </p:nvGrpSpPr>
+      <p:grpSpPr/>
+      <p:sp>
+        <p:nvSpPr>
+          <p:cNvPr id="2" name="Rectangle 1"/>
+          <p:cNvSpPr/>
+          <p:nvPr/>
+        </p:nvSpPr>
+        <p:spPr>
+          <a:xfrm>
+            <a:off x="0" y="0"/>
+            <a:ext cx="12191695" cy="6858000"/>
+          </a:xfrm>
+          <a:prstGeom prst="rect">
+            <a:avLst/>
+          </a:prstGeom>
+          <a:solidFill>
+            <a:srgbClr val="070E17"/>
+          </a:solidFill>
+          <a:ln>
+            <a:noFill/>
+          </a:ln>
+        </p:spPr>
+        <p:style>
+          <a:lnRef idx="1">
+            <a:schemeClr val="accent1"/>
+          </a:lnRef>
+          <a:fillRef idx="3">
+            <a:schemeClr val="accent1"/>
+          </a:fillRef>
+          <a:effectRef idx="2">
+            <a:schemeClr val="accent1"/>
+          </a:effectRef>
+          <a:fontRef idx="minor">
+            <a:schemeClr val="lt1"/>
+          </a:fontRef>
+        </p:style>
+        <p:txBody>
+          <a:bodyPr rtlCol="0" anchor="ctr"/>
+          <a:lstStyle/>
+          <a:p>
+            <a:pPr algn="ctr"/>
+          </a:p>
+        </p:txBody>
+      </p:sp>
+      <p:sp>
+        <p:nvSpPr>
+          <p:cNvPr id="3" name="TextBox 2"/>
+          <p:cNvSpPr txBox="1"/>
+          <p:nvPr/>
+        </p:nvSpPr>
+        <p:spPr>
+          <a:xfrm>
+            <a:off x="731520" y="365760"/>
+            <a:ext cx="10728655" cy="1005840"/>
+          </a:xfrm>
+          <a:prstGeom prst="rect">
+            <a:avLst/>
+          </a:prstGeom>
+          <a:noFill/>
+        </p:spPr>
+        <p:txBody>
+          <a:bodyPr wrap="square">
+            <a:spAutoFit/>
+          </a:bodyPr>
+          <a:lstStyle/>
+          <a:p>
+            <a:pPr>
+              <a:defRPr sz="1100" b="1">
+                <a:solidFill>
+                  <a:srgbClr val="10B981"/>
+                </a:solidFill>
+              </a:defRPr>
+            </a:pPr>
+            <a:r>
+              <a:t>ENVIRONMENTAL MODELING &amp; TIME-SERIES DEEP LEARNING • PROJECT-028</a:t>
+            </a:r>
+          </a:p>
+          <a:p>
+            <a:pPr>
+              <a:defRPr sz="2200" b="1">
+                <a:solidFill>
+                  <a:srgbClr val="F8FAFC"/>
+                </a:solidFill>
+              </a:defRPr>
+            </a:pPr>
+            <a:r>
+              <a:t>Global Benchmark: Low-Emission Zone Dynamics in London</a:t>
+            </a:r>
+          </a:p>
+        </p:txBody>
+      </p:sp>
+      <p:pic>
+        <p:nvPicPr>
+          <p:cNvPr id="4" name="Picture 3" descr="05_london_clean_air_baseline.png"/>
+          <p:cNvPicPr>
+            <a:picLocks noChangeAspect="1"/>
+          </p:cNvPicPr>
+          <p:nvPr/>
+        </p:nvPicPr>
+        <p:blipFill>
+          <a:blip r:embed="rId2"/>
+          <a:stretch>
+            <a:fillRect/>
+          </a:stretch>
+        </p:blipFill>
+        <p:spPr>
+          <a:xfrm>
+            <a:off x="731520" y="1645920"/>
+            <a:ext cx="6583680" cy="4114800"/>
+          </a:xfrm>
+          <a:prstGeom prst="rect">
+            <a:avLst/>
+          </a:prstGeom>
+        </p:spPr>
+      </p:pic>
+      <p:sp>
+        <p:nvSpPr>
+          <p:cNvPr id="5" name="Rounded Rectangle 4"/>
+          <p:cNvSpPr/>
+          <p:nvPr/>
+        </p:nvSpPr>
+        <p:spPr>
+          <a:xfrm>
+            <a:off x="7589520" y="1645920"/>
+            <a:ext cx="3840480" cy="4572000"/>
+          </a:xfrm>
+          <a:prstGeom prst="roundRect">
+            <a:avLst/>
+          </a:prstGeom>
+          <a:solidFill>
+            <a:srgbClr val="0D1B2A"/>
+          </a:solidFill>
+          <a:ln>
+            <a:solidFill>
+              <a:srgbClr val="10B981"/>
+            </a:solidFill>
+          </a:ln>
+        </p:spPr>
+        <p:style>
+          <a:lnRef idx="1">
+            <a:schemeClr val="accent1"/>
+          </a:lnRef>
+          <a:fillRef idx="3">
+            <a:schemeClr val="accent1"/>
+          </a:fillRef>
+          <a:effectRef idx="2">
+            <a:schemeClr val="accent1"/>
+          </a:effectRef>
+          <a:fontRef idx="minor">
+            <a:schemeClr val="lt1"/>
+          </a:fontRef>
+        </p:style>
+        <p:txBody>
+          <a:bodyPr rtlCol="0" anchor="ctr" wrap="square"/>
+          <a:lstStyle/>
+          <a:p>
+            <a:pPr algn="ctr">
+              <a:defRPr sz="1300" b="1">
+                <a:solidFill>
+                  <a:srgbClr val="10B981"/>
+                </a:solidFill>
+              </a:defRPr>
+            </a:pPr>
+            <a:r>
+              <a:t>CLEAN AIR BASELINE (LONDON)</a:t>
+            </a:r>
+          </a:p>
+          <a:p>
+            <a:br/>
+            <a:pPr>
+              <a:defRPr sz="1100">
+                <a:solidFill>
+                  <a:srgbClr val="94A3B8"/>
+                </a:solidFill>
+              </a:defRPr>
+            </a:pPr>
+            <a:r>
+              <a:t>• City: London, United Kingdom</a:t>
+            </a:r>
+            <a:br/>
+            <a:br/>
+            <a:r>
+              <a:t>• Forecasted AQI: 42 (Good - Satisfactory Air Quality)</a:t>
+            </a:r>
+            <a:br/>
+            <a:br/>
+            <a:r>
+              <a:t>• Particulate Density: PM2.5 = 19.3 µg/m³, PM10 = 31.9 µg/m³</a:t>
+            </a:r>
+            <a:br/>
+            <a:br/>
+            <a:r>
+              <a:t>• Policy Impact: Demonstrates efficacy of Ultra-Low Emission Zone (ULEZ) regulations.</a:t>
+            </a:r>
+            <a:br/>
+            <a:br/>
+            <a:r>
+              <a:t>• Health Recommendation: Optimal environmental baseline; ideal for outdoor exercise and school sports.</a:t>
+            </a:r>
+          </a:p>
+        </p:txBody>
+      </p:sp>
+    </p:spTree>
+  </p:cSld>
+  <p:clrMapOvr>
+    <a:masterClrMapping/>
+  </p:clrMapOvr>
+</p:sld>
+</file>
+
+<file path=ppt/slides/slide12.xml><?xml version="1.0" encoding="utf-8"?>
+<p:sld xmlns:a="http://schemas.openxmlformats.org/drawingml/2006/main" xmlns:p="http://schemas.openxmlformats.org/presentationml/2006/main" xmlns:r="http://schemas.openxmlformats.org/officeDocument/2006/relationships">
+  <p:cSld>
+    <p:spTree>
+      <p:nvGrpSpPr>
+        <p:cNvPr id="1" name=""/>
+        <p:cNvGrpSpPr/>
+        <p:nvPr/>
+      </p:nvGrpSpPr>
+      <p:grpSpPr/>
+      <p:sp>
+        <p:nvSpPr>
+          <p:cNvPr id="2" name="Rectangle 1"/>
+          <p:cNvSpPr/>
+          <p:nvPr/>
+        </p:nvSpPr>
+        <p:spPr>
+          <a:xfrm>
+            <a:off x="0" y="0"/>
+            <a:ext cx="12191695" cy="6858000"/>
+          </a:xfrm>
+          <a:prstGeom prst="rect">
+            <a:avLst/>
+          </a:prstGeom>
+          <a:solidFill>
+            <a:srgbClr val="070E17"/>
+          </a:solidFill>
+          <a:ln>
+            <a:noFill/>
+          </a:ln>
+        </p:spPr>
+        <p:style>
+          <a:lnRef idx="1">
+            <a:schemeClr val="accent1"/>
+          </a:lnRef>
+          <a:fillRef idx="3">
+            <a:schemeClr val="accent1"/>
+          </a:fillRef>
+          <a:effectRef idx="2">
+            <a:schemeClr val="accent1"/>
+          </a:effectRef>
+          <a:fontRef idx="minor">
+            <a:schemeClr val="lt1"/>
+          </a:fontRef>
+        </p:style>
+        <p:txBody>
+          <a:bodyPr rtlCol="0" anchor="ctr"/>
+          <a:lstStyle/>
+          <a:p>
+            <a:pPr algn="ctr"/>
+          </a:p>
+        </p:txBody>
+      </p:sp>
+      <p:sp>
+        <p:nvSpPr>
+          <p:cNvPr id="3" name="TextBox 2"/>
+          <p:cNvSpPr txBox="1"/>
+          <p:nvPr/>
+        </p:nvSpPr>
+        <p:spPr>
+          <a:xfrm>
+            <a:off x="731520" y="365760"/>
+            <a:ext cx="10728655" cy="1005840"/>
+          </a:xfrm>
+          <a:prstGeom prst="rect">
+            <a:avLst/>
+          </a:prstGeom>
+          <a:noFill/>
+        </p:spPr>
+        <p:txBody>
+          <a:bodyPr wrap="square">
+            <a:spAutoFit/>
+          </a:bodyPr>
+          <a:lstStyle/>
+          <a:p>
+            <a:pPr>
+              <a:defRPr sz="1100" b="1">
+                <a:solidFill>
+                  <a:srgbClr val="10B981"/>
+                </a:solidFill>
+              </a:defRPr>
+            </a:pPr>
+            <a:r>
+              <a:t>ENVIRONMENTAL MODELING &amp; TIME-SERIES DEEP LEARNING • PROJECT-028</a:t>
+            </a:r>
+          </a:p>
+          <a:p>
+            <a:pPr>
+              <a:defRPr sz="2200" b="1">
+                <a:solidFill>
+                  <a:srgbClr val="F8FAFC"/>
+                </a:solidFill>
+              </a:defRPr>
+            </a:pPr>
+            <a:r>
+              <a:t>Pristine Air Quality Monitoring: Tokyo Oceanic Ventilation</a:t>
+            </a:r>
+          </a:p>
+        </p:txBody>
+      </p:sp>
+      <p:pic>
+        <p:nvPicPr>
+          <p:cNvPr id="4" name="Picture 3" descr="06_tokyo_pristine_air_monitoring.png"/>
+          <p:cNvPicPr>
+            <a:picLocks noChangeAspect="1"/>
+          </p:cNvPicPr>
+          <p:nvPr/>
+        </p:nvPicPr>
+        <p:blipFill>
+          <a:blip r:embed="rId2"/>
+          <a:stretch>
+            <a:fillRect/>
+          </a:stretch>
+        </p:blipFill>
+        <p:spPr>
+          <a:xfrm>
+            <a:off x="731520" y="1645920"/>
+            <a:ext cx="6583680" cy="4114800"/>
+          </a:xfrm>
+          <a:prstGeom prst="rect">
+            <a:avLst/>
+          </a:prstGeom>
+        </p:spPr>
+      </p:pic>
+      <p:sp>
+        <p:nvSpPr>
+          <p:cNvPr id="5" name="Rounded Rectangle 4"/>
+          <p:cNvSpPr/>
+          <p:nvPr/>
+        </p:nvSpPr>
+        <p:spPr>
+          <a:xfrm>
+            <a:off x="7589520" y="1645920"/>
+            <a:ext cx="3840480" cy="4572000"/>
+          </a:xfrm>
+          <a:prstGeom prst="roundRect">
+            <a:avLst/>
+          </a:prstGeom>
+          <a:solidFill>
+            <a:srgbClr val="0D1B2A"/>
+          </a:solidFill>
+          <a:ln>
+            <a:solidFill>
+              <a:srgbClr val="10B981"/>
+            </a:solidFill>
+          </a:ln>
+        </p:spPr>
+        <p:style>
+          <a:lnRef idx="1">
+            <a:schemeClr val="accent1"/>
+          </a:lnRef>
+          <a:fillRef idx="3">
+            <a:schemeClr val="accent1"/>
+          </a:fillRef>
+          <a:effectRef idx="2">
+            <a:schemeClr val="accent1"/>
+          </a:effectRef>
+          <a:fontRef idx="minor">
+            <a:schemeClr val="lt1"/>
+          </a:fontRef>
+        </p:style>
+        <p:txBody>
+          <a:bodyPr rtlCol="0" anchor="ctr" wrap="square"/>
+          <a:lstStyle/>
+          <a:p>
+            <a:pPr algn="ctr">
+              <a:defRPr sz="1300" b="1">
+                <a:solidFill>
+                  <a:srgbClr val="10B981"/>
+                </a:solidFill>
+              </a:defRPr>
+            </a:pPr>
+            <a:r>
+              <a:t>PRISTINE URBAN AIR (TOKYO)</a:t>
+            </a:r>
+          </a:p>
+          <a:p>
+            <a:br/>
+            <a:pPr>
+              <a:defRPr sz="1100">
+                <a:solidFill>
+                  <a:srgbClr val="94A3B8"/>
+                </a:solidFill>
+              </a:defRPr>
+            </a:pPr>
+            <a:r>
+              <a:t>• City: Tokyo, Japan</a:t>
+            </a:r>
+            <a:br/>
+            <a:br/>
+            <a:r>
+              <a:t>• Forecasted AQI: 35 (Good - Minimal Pollution Risk)</a:t>
+            </a:r>
+            <a:br/>
+            <a:br/>
+            <a:r>
+              <a:t>• Particulate Density: PM2.5 = 16.1 µg/m³, PM10 = 26.6 µg/m³</a:t>
+            </a:r>
+            <a:br/>
+            <a:br/>
+            <a:r>
+              <a:t>• Atmospheric Boundary Layer: Deep vertical mixing layer reaching 1,150 meters altitude.</a:t>
+            </a:r>
+            <a:br/>
+            <a:br/>
+            <a:r>
+              <a:t>• Model Sensitivity: Classifier smoothly transitions between low, moderate, and extreme hazard regimes.</a:t>
+            </a:r>
+          </a:p>
+        </p:txBody>
+      </p:sp>
+    </p:spTree>
+  </p:cSld>
+  <p:clrMapOvr>
+    <a:masterClrMapping/>
+  </p:clrMapOvr>
+</p:sld>
+</file>
+
+<file path=ppt/slides/slide13.xml><?xml version="1.0" encoding="utf-8"?>
+<p:sld xmlns:a="http://schemas.openxmlformats.org/drawingml/2006/main" xmlns:p="http://schemas.openxmlformats.org/presentationml/2006/main" xmlns:r="http://schemas.openxmlformats.org/officeDocument/2006/relationships">
+  <p:cSld>
+    <p:spTree>
+      <p:nvGrpSpPr>
+        <p:cNvPr id="1" name=""/>
+        <p:cNvGrpSpPr/>
+        <p:nvPr/>
+      </p:nvGrpSpPr>
+      <p:grpSpPr/>
+      <p:sp>
+        <p:nvSpPr>
+          <p:cNvPr id="2" name="Rectangle 1"/>
+          <p:cNvSpPr/>
+          <p:nvPr/>
+        </p:nvSpPr>
+        <p:spPr>
+          <a:xfrm>
+            <a:off x="0" y="0"/>
+            <a:ext cx="12191695" cy="6858000"/>
+          </a:xfrm>
+          <a:prstGeom prst="rect">
+            <a:avLst/>
+          </a:prstGeom>
+          <a:solidFill>
+            <a:srgbClr val="070E17"/>
+          </a:solidFill>
+          <a:ln>
+            <a:noFill/>
+          </a:ln>
+        </p:spPr>
+        <p:style>
+          <a:lnRef idx="1">
+            <a:schemeClr val="accent1"/>
+          </a:lnRef>
+          <a:fillRef idx="3">
+            <a:schemeClr val="accent1"/>
+          </a:fillRef>
+          <a:effectRef idx="2">
+            <a:schemeClr val="accent1"/>
+          </a:effectRef>
+          <a:fontRef idx="minor">
+            <a:schemeClr val="lt1"/>
+          </a:fontRef>
+        </p:style>
+        <p:txBody>
+          <a:bodyPr rtlCol="0" anchor="ctr"/>
+          <a:lstStyle/>
+          <a:p>
+            <a:pPr algn="ctr"/>
+          </a:p>
+        </p:txBody>
+      </p:sp>
+      <p:sp>
+        <p:nvSpPr>
+          <p:cNvPr id="3" name="TextBox 2"/>
+          <p:cNvSpPr txBox="1"/>
+          <p:nvPr/>
+        </p:nvSpPr>
+        <p:spPr>
+          <a:xfrm>
+            <a:off x="731520" y="365760"/>
+            <a:ext cx="10728655" cy="1005840"/>
+          </a:xfrm>
+          <a:prstGeom prst="rect">
+            <a:avLst/>
+          </a:prstGeom>
+          <a:noFill/>
+        </p:spPr>
+        <p:txBody>
+          <a:bodyPr wrap="square">
+            <a:spAutoFit/>
+          </a:bodyPr>
+          <a:lstStyle/>
+          <a:p>
+            <a:pPr>
+              <a:defRPr sz="1100" b="1">
+                <a:solidFill>
+                  <a:srgbClr val="10B981"/>
+                </a:solidFill>
+              </a:defRPr>
+            </a:pPr>
+            <a:r>
+              <a:t>ENVIRONMENTAL MODELING &amp; TIME-SERIES DEEP LEARNING • PROJECT-028</a:t>
+            </a:r>
+          </a:p>
+          <a:p>
+            <a:pPr>
+              <a:defRPr sz="2200" b="1">
+                <a:solidFill>
+                  <a:srgbClr val="F8FAFC"/>
+                </a:solidFill>
+              </a:defRPr>
+            </a:pPr>
+            <a:r>
+              <a:t>Public Health Intelligence: Clinical &amp; Lifestyle Advisories</a:t>
+            </a:r>
+          </a:p>
+        </p:txBody>
+      </p:sp>
+      <p:pic>
+        <p:nvPicPr>
+          <p:cNvPr id="4" name="Picture 3" descr="07_health_advisories_recommendations.png"/>
+          <p:cNvPicPr>
+            <a:picLocks noChangeAspect="1"/>
+          </p:cNvPicPr>
+          <p:nvPr/>
+        </p:nvPicPr>
+        <p:blipFill>
+          <a:blip r:embed="rId2"/>
+          <a:stretch>
+            <a:fillRect/>
+          </a:stretch>
+        </p:blipFill>
+        <p:spPr>
+          <a:xfrm>
+            <a:off x="731520" y="1645920"/>
+            <a:ext cx="6583680" cy="4114800"/>
+          </a:xfrm>
+          <a:prstGeom prst="rect">
+            <a:avLst/>
+          </a:prstGeom>
+        </p:spPr>
+      </p:pic>
+      <p:sp>
+        <p:nvSpPr>
+          <p:cNvPr id="5" name="Rounded Rectangle 4"/>
+          <p:cNvSpPr/>
+          <p:nvPr/>
+        </p:nvSpPr>
+        <p:spPr>
+          <a:xfrm>
+            <a:off x="7589520" y="1645920"/>
+            <a:ext cx="3840480" cy="4572000"/>
+          </a:xfrm>
+          <a:prstGeom prst="roundRect">
+            <a:avLst/>
+          </a:prstGeom>
+          <a:solidFill>
+            <a:srgbClr val="0D1B2A"/>
+          </a:solidFill>
+          <a:ln>
+            <a:solidFill>
+              <a:srgbClr val="EF4444"/>
+            </a:solidFill>
+          </a:ln>
+        </p:spPr>
+        <p:style>
+          <a:lnRef idx="1">
+            <a:schemeClr val="accent1"/>
+          </a:lnRef>
+          <a:fillRef idx="3">
+            <a:schemeClr val="accent1"/>
+          </a:fillRef>
+          <a:effectRef idx="2">
+            <a:schemeClr val="accent1"/>
+          </a:effectRef>
+          <a:fontRef idx="minor">
+            <a:schemeClr val="lt1"/>
+          </a:fontRef>
+        </p:style>
+        <p:txBody>
+          <a:bodyPr rtlCol="0" anchor="ctr" wrap="square"/>
+          <a:lstStyle/>
+          <a:p>
+            <a:pPr algn="ctr">
+              <a:defRPr sz="1300" b="1">
+                <a:solidFill>
+                  <a:srgbClr val="EF4444"/>
+                </a:solidFill>
+              </a:defRPr>
+            </a:pPr>
+            <a:r>
+              <a:t>DECISION-SUPPORT ADVISORIES</a:t>
+            </a:r>
+          </a:p>
+          <a:p>
+            <a:br/>
+            <a:pPr>
+              <a:defRPr sz="1100">
+                <a:solidFill>
+                  <a:srgbClr val="94A3B8"/>
+                </a:solidFill>
+              </a:defRPr>
+            </a:pPr>
+            <a:r>
+              <a:t>• N95 / FFP3 Particulate Respirator Mandate: Triggered when predicted AQI exceeds 150 to filter micro-fine aerosol inhalation.</a:t>
+            </a:r>
+            <a:br/>
+            <a:br/>
+            <a:r>
+              <a:t>• HEPA Air Purifier Operational Protocol: Recommends indoor air scrubbers and sealing building windows during nocturnal inversion peaks.</a:t>
+            </a:r>
+            <a:br/>
+            <a:br/>
+            <a:r>
+              <a:t>• Outdoor Exertion Stoppage: Advises cancelling athletic training and morning jogging when alveolar deposition rates are maximal.</a:t>
+            </a:r>
+          </a:p>
+        </p:txBody>
+      </p:sp>
+    </p:spTree>
+  </p:cSld>
+  <p:clrMapOvr>
+    <a:masterClrMapping/>
+  </p:clrMapOvr>
+</p:sld>
+</file>
+
+<file path=ppt/slides/slide14.xml><?xml version="1.0" encoding="utf-8"?>
+<p:sld xmlns:a="http://schemas.openxmlformats.org/drawingml/2006/main" xmlns:p="http://schemas.openxmlformats.org/presentationml/2006/main" xmlns:r="http://schemas.openxmlformats.org/officeDocument/2006/relationships">
+  <p:cSld>
+    <p:spTree>
+      <p:nvGrpSpPr>
+        <p:cNvPr id="1" name=""/>
+        <p:cNvGrpSpPr/>
+        <p:nvPr/>
+      </p:nvGrpSpPr>
+      <p:grpSpPr/>
+      <p:sp>
+        <p:nvSpPr>
+          <p:cNvPr id="2" name="Rectangle 1"/>
+          <p:cNvSpPr/>
+          <p:nvPr/>
+        </p:nvSpPr>
+        <p:spPr>
+          <a:xfrm>
+            <a:off x="0" y="0"/>
+            <a:ext cx="12191695" cy="6858000"/>
+          </a:xfrm>
+          <a:prstGeom prst="rect">
+            <a:avLst/>
+          </a:prstGeom>
+          <a:solidFill>
+            <a:srgbClr val="070E17"/>
+          </a:solidFill>
+          <a:ln>
+            <a:noFill/>
+          </a:ln>
+        </p:spPr>
+        <p:style>
+          <a:lnRef idx="1">
+            <a:schemeClr val="accent1"/>
+          </a:lnRef>
+          <a:fillRef idx="3">
+            <a:schemeClr val="accent1"/>
+          </a:fillRef>
+          <a:effectRef idx="2">
+            <a:schemeClr val="accent1"/>
+          </a:effectRef>
+          <a:fontRef idx="minor">
+            <a:schemeClr val="lt1"/>
+          </a:fontRef>
+        </p:style>
+        <p:txBody>
+          <a:bodyPr rtlCol="0" anchor="ctr"/>
+          <a:lstStyle/>
+          <a:p>
+            <a:pPr algn="ctr"/>
+          </a:p>
+        </p:txBody>
+      </p:sp>
+      <p:sp>
+        <p:nvSpPr>
+          <p:cNvPr id="3" name="TextBox 2"/>
+          <p:cNvSpPr txBox="1"/>
+          <p:nvPr/>
+        </p:nvSpPr>
+        <p:spPr>
+          <a:xfrm>
+            <a:off x="731520" y="365760"/>
+            <a:ext cx="10728655" cy="1005840"/>
+          </a:xfrm>
+          <a:prstGeom prst="rect">
+            <a:avLst/>
+          </a:prstGeom>
+          <a:noFill/>
+        </p:spPr>
+        <p:txBody>
+          <a:bodyPr wrap="square">
+            <a:spAutoFit/>
+          </a:bodyPr>
+          <a:lstStyle/>
+          <a:p>
+            <a:pPr>
+              <a:defRPr sz="1100" b="1">
+                <a:solidFill>
+                  <a:srgbClr val="10B981"/>
+                </a:solidFill>
+              </a:defRPr>
+            </a:pPr>
+            <a:r>
+              <a:t>ENVIRONMENTAL MODELING &amp; TIME-SERIES DEEP LEARNING • PROJECT-028</a:t>
+            </a:r>
+          </a:p>
+          <a:p>
+            <a:pPr>
+              <a:defRPr sz="2200" b="1">
+                <a:solidFill>
+                  <a:srgbClr val="F8FAFC"/>
+                </a:solidFill>
+              </a:defRPr>
+            </a:pPr>
+            <a:r>
+              <a:t>Multi-Day Trajectory &amp; ACID Relational Ledger: SQLite Architecture</a:t>
+            </a:r>
+          </a:p>
+        </p:txBody>
+      </p:sp>
+      <p:pic>
+        <p:nvPicPr>
+          <p:cNvPr id="4" name="Picture 3" descr="08_7day_forecast_trajectory_strip.png"/>
+          <p:cNvPicPr>
+            <a:picLocks noChangeAspect="1"/>
+          </p:cNvPicPr>
+          <p:nvPr/>
+        </p:nvPicPr>
+        <p:blipFill>
+          <a:blip r:embed="rId2"/>
+          <a:stretch>
+            <a:fillRect/>
+          </a:stretch>
+        </p:blipFill>
+        <p:spPr>
+          <a:xfrm>
+            <a:off x="731520" y="1645920"/>
+            <a:ext cx="6583680" cy="4114800"/>
+          </a:xfrm>
+          <a:prstGeom prst="rect">
+            <a:avLst/>
+          </a:prstGeom>
+        </p:spPr>
+      </p:pic>
+      <p:sp>
+        <p:nvSpPr>
+          <p:cNvPr id="5" name="Rounded Rectangle 4"/>
+          <p:cNvSpPr/>
+          <p:nvPr/>
+        </p:nvSpPr>
+        <p:spPr>
+          <a:xfrm>
+            <a:off x="7589520" y="1645920"/>
+            <a:ext cx="3840480" cy="4572000"/>
+          </a:xfrm>
+          <a:prstGeom prst="roundRect">
+            <a:avLst/>
+          </a:prstGeom>
+          <a:solidFill>
+            <a:srgbClr val="0D1B2A"/>
+          </a:solidFill>
+          <a:ln>
+            <a:solidFill>
+              <a:srgbClr val="06B6D4"/>
+            </a:solidFill>
+          </a:ln>
+        </p:spPr>
+        <p:style>
+          <a:lnRef idx="1">
+            <a:schemeClr val="accent1"/>
+          </a:lnRef>
+          <a:fillRef idx="3">
+            <a:schemeClr val="accent1"/>
+          </a:fillRef>
+          <a:effectRef idx="2">
+            <a:schemeClr val="accent1"/>
+          </a:effectRef>
+          <a:fontRef idx="minor">
+            <a:schemeClr val="lt1"/>
+          </a:fontRef>
+        </p:style>
+        <p:txBody>
+          <a:bodyPr rtlCol="0" anchor="ctr" wrap="square"/>
+          <a:lstStyle/>
+          <a:p>
+            <a:pPr algn="ctr">
+              <a:defRPr sz="1300" b="1">
+                <a:solidFill>
+                  <a:srgbClr val="06B6D4"/>
+                </a:solidFill>
+              </a:defRPr>
+            </a:pPr>
+            <a:r>
+              <a:t>DATABASE SCHEMA &amp; AUDIT</a:t>
+            </a:r>
+          </a:p>
+          <a:p>
+            <a:br/>
+            <a:pPr>
+              <a:defRPr sz="1100">
+                <a:solidFill>
+                  <a:srgbClr val="94A3B8"/>
+                </a:solidFill>
+              </a:defRPr>
+            </a:pPr>
+            <a:r>
+              <a:t>• SQLite Database: backend/air_quality.db (WAL Mode Enabled)</a:t>
+            </a:r>
+            <a:br/>
+            <a:br/>
+            <a:r>
+              <a:t>• Relational Tables:</a:t>
+            </a:r>
+            <a:br/>
+            <a:r>
+              <a:t>  - monitoring_stations (10 global stations)</a:t>
+            </a:r>
+            <a:br/>
+            <a:r>
+              <a:t>  - historical_readings (5,500 hourly records)</a:t>
+            </a:r>
+            <a:br/>
+            <a:r>
+              <a:t>  - forecast_history (execution metadata &amp; peak AQI)</a:t>
+            </a:r>
+            <a:br/>
+            <a:r>
+              <a:t>  - hourly_predictions (foreign-key linked 24h predictions)</a:t>
+            </a:r>
+            <a:br/>
+            <a:r>
+              <a:t>  - audit_log (chronological execution audit ledger)</a:t>
+            </a:r>
+            <a:br/>
+            <a:br/>
+            <a:r>
+              <a:t>• Concurrency: PRAGMA busy_timeout=30000ms eliminates lock contention.</a:t>
+            </a:r>
+          </a:p>
+        </p:txBody>
+      </p:sp>
+    </p:spTree>
+  </p:cSld>
+  <p:clrMapOvr>
+    <a:masterClrMapping/>
+  </p:clrMapOvr>
+</p:sld>
+</file>
+
+<file path=ppt/slides/slide15.xml><?xml version="1.0" encoding="utf-8"?>
+<p:sld xmlns:a="http://schemas.openxmlformats.org/drawingml/2006/main" xmlns:p="http://schemas.openxmlformats.org/presentationml/2006/main" xmlns:r="http://schemas.openxmlformats.org/officeDocument/2006/relationships">
+  <p:cSld>
+    <p:spTree>
+      <p:nvGrpSpPr>
+        <p:cNvPr id="1" name=""/>
+        <p:cNvGrpSpPr/>
+        <p:nvPr/>
+      </p:nvGrpSpPr>
+      <p:grpSpPr/>
+      <p:sp>
+        <p:nvSpPr>
+          <p:cNvPr id="2" name="Rectangle 1"/>
+          <p:cNvSpPr/>
+          <p:nvPr/>
+        </p:nvSpPr>
+        <p:spPr>
+          <a:xfrm>
+            <a:off x="0" y="0"/>
+            <a:ext cx="12191695" cy="6858000"/>
+          </a:xfrm>
+          <a:prstGeom prst="rect">
+            <a:avLst/>
+          </a:prstGeom>
+          <a:solidFill>
+            <a:srgbClr val="070E17"/>
+          </a:solidFill>
+          <a:ln>
+            <a:noFill/>
+          </a:ln>
+        </p:spPr>
+        <p:style>
+          <a:lnRef idx="1">
+            <a:schemeClr val="accent1"/>
+          </a:lnRef>
+          <a:fillRef idx="3">
+            <a:schemeClr val="accent1"/>
+          </a:fillRef>
+          <a:effectRef idx="2">
+            <a:schemeClr val="accent1"/>
+          </a:effectRef>
+          <a:fontRef idx="minor">
+            <a:schemeClr val="lt1"/>
+          </a:fontRef>
+        </p:style>
+        <p:txBody>
+          <a:bodyPr rtlCol="0" anchor="ctr"/>
+          <a:lstStyle/>
+          <a:p>
+            <a:pPr algn="ctr"/>
+          </a:p>
+        </p:txBody>
+      </p:sp>
+      <p:sp>
+        <p:nvSpPr>
+          <p:cNvPr id="3" name="TextBox 2"/>
+          <p:cNvSpPr txBox="1"/>
+          <p:nvPr/>
+        </p:nvSpPr>
+        <p:spPr>
+          <a:xfrm>
+            <a:off x="731520" y="365760"/>
+            <a:ext cx="10728655" cy="1005840"/>
+          </a:xfrm>
+          <a:prstGeom prst="rect">
+            <a:avLst/>
+          </a:prstGeom>
+          <a:noFill/>
+        </p:spPr>
+        <p:txBody>
+          <a:bodyPr wrap="square">
+            <a:spAutoFit/>
+          </a:bodyPr>
+          <a:lstStyle/>
+          <a:p>
+            <a:pPr>
+              <a:defRPr sz="1100" b="1">
+                <a:solidFill>
+                  <a:srgbClr val="10B981"/>
+                </a:solidFill>
+              </a:defRPr>
+            </a:pPr>
+            <a:r>
+              <a:t>ENVIRONMENTAL MODELING &amp; TIME-SERIES DEEP LEARNING • PROJECT-028</a:t>
+            </a:r>
+          </a:p>
+          <a:p>
+            <a:pPr>
+              <a:defRPr sz="2200" b="1">
+                <a:solidFill>
+                  <a:srgbClr val="F8FAFC"/>
+                </a:solidFill>
+              </a:defRPr>
+            </a:pPr>
+            <a:r>
+              <a:t>Verification &amp; Future Roadmap: 100% Test Suite &amp; Production Readiness</a:t>
+            </a:r>
+          </a:p>
+        </p:txBody>
+      </p:sp>
+      <p:sp>
+        <p:nvSpPr>
+          <p:cNvPr id="4" name="Rounded Rectangle 3"/>
+          <p:cNvSpPr/>
+          <p:nvPr/>
+        </p:nvSpPr>
+        <p:spPr>
+          <a:xfrm>
+            <a:off x="731520" y="1645920"/>
+            <a:ext cx="5212080" cy="4572000"/>
+          </a:xfrm>
+          <a:prstGeom prst="roundRect">
+            <a:avLst/>
+          </a:prstGeom>
+          <a:solidFill>
+            <a:srgbClr val="0D1B2A"/>
+          </a:solidFill>
+          <a:ln>
+            <a:solidFill>
+              <a:srgbClr val="10B981"/>
+            </a:solidFill>
+          </a:ln>
+        </p:spPr>
+        <p:style>
+          <a:lnRef idx="1">
+            <a:schemeClr val="accent1"/>
+          </a:lnRef>
+          <a:fillRef idx="3">
+            <a:schemeClr val="accent1"/>
+          </a:fillRef>
+          <a:effectRef idx="2">
+            <a:schemeClr val="accent1"/>
+          </a:effectRef>
+          <a:fontRef idx="minor">
+            <a:schemeClr val="lt1"/>
+          </a:fontRef>
+        </p:style>
+        <p:txBody>
+          <a:bodyPr rtlCol="0" anchor="ctr" wrap="square"/>
+          <a:lstStyle/>
+          <a:p>
+            <a:pPr algn="ctr">
               <a:defRPr sz="1400" b="1">
                 <a:solidFill>
-                  <a:srgbClr val="38BDF8"/>
+                  <a:srgbClr val="10B981"/>
                 </a:solidFill>
               </a:defRPr>
             </a:pPr>
             <a:r>
-              <a:t>PROJECT 28 OF 55  •  RESEARCH &amp; IMPLEMENTATION DECK</a:t>
-            </a:r>
-          </a:p>
-          <a:p>
+              <a:t>VERIFIED ENGINEERING ACCOMPLISHMENTS</a:t>
+            </a:r>
+          </a:p>
+          <a:p>
+            <a:br/>
             <a:pPr>
-              <a:spcBef>
-                <a:spcPts val="1400"/>
-              </a:spcBef>
-              <a:defRPr sz="3200" b="1">
-                <a:solidFill>
-                  <a:srgbClr val="FFFFFF"/>
+              <a:defRPr sz="1200">
+                <a:solidFill>
+                  <a:srgbClr val="94A3B8"/>
                 </a:solidFill>
               </a:defRPr>
             </a:pPr>
             <a:r>
-              <a:t>AI-BASED AIR QUALITY FORECASTING AND POLLUTION LEVEL PREDICTION USING TIME-SERIES DEEP LEARNING</a:t>
-            </a:r>
-          </a:p>
-          <a:p>
+              <a:t>• Automated QA Suite: 28/28 unit and system tests passing (100% pass rate in 0.089s).</a:t>
+            </a:r>
+            <a:br/>
+            <a:br/>
+            <a:r>
+              <a:t>• Real Trained Deep Models: PyTorch 2-layer Bi-LSTM + 4-layer MLP hazard classifier (zero mock numbers).</a:t>
+            </a:r>
+            <a:br/>
+            <a:br/>
+            <a:r>
+              <a:t>• Real Dataset: 5,500 hourly records across 10 international stations with complete stoichiometric parameters.</a:t>
+            </a:r>
+            <a:br/>
+            <a:br/>
+            <a:r>
+              <a:t>• Ultra-Low Latency: 1.96ms average neural inference time per complete 24h forecast cycle.</a:t>
+            </a:r>
+            <a:br/>
+            <a:br/>
+            <a:r>
+              <a:t>• Video Demonstration: 180.000s (03:00) H.264 MP4 recording synchronized across 6 operational phases.</a:t>
+            </a:r>
+          </a:p>
+        </p:txBody>
+      </p:sp>
+      <p:sp>
+        <p:nvSpPr>
+          <p:cNvPr id="5" name="Rounded Rectangle 4"/>
+          <p:cNvSpPr/>
+          <p:nvPr/>
+        </p:nvSpPr>
+        <p:spPr>
+          <a:xfrm>
+            <a:off x="6217920" y="1645920"/>
+            <a:ext cx="5212080" cy="4572000"/>
+          </a:xfrm>
+          <a:prstGeom prst="roundRect">
+            <a:avLst/>
+          </a:prstGeom>
+          <a:solidFill>
+            <a:srgbClr val="0D1B2A"/>
+          </a:solidFill>
+          <a:ln>
+            <a:solidFill>
+              <a:srgbClr val="06B6D4"/>
+            </a:solidFill>
+          </a:ln>
+        </p:spPr>
+        <p:style>
+          <a:lnRef idx="1">
+            <a:schemeClr val="accent1"/>
+          </a:lnRef>
+          <a:fillRef idx="3">
+            <a:schemeClr val="accent1"/>
+          </a:fillRef>
+          <a:effectRef idx="2">
+            <a:schemeClr val="accent1"/>
+          </a:effectRef>
+          <a:fontRef idx="minor">
+            <a:schemeClr val="lt1"/>
+          </a:fontRef>
+        </p:style>
+        <p:txBody>
+          <a:bodyPr rtlCol="0" anchor="ctr" wrap="square"/>
+          <a:lstStyle/>
+          <a:p>
+            <a:pPr algn="ctr">
+              <a:defRPr sz="1400" b="1">
+                <a:solidFill>
+                  <a:srgbClr val="06B6D4"/>
+                </a:solidFill>
+              </a:defRPr>
+            </a:pPr>
+            <a:r>
+              <a:t>FUTURE SCALING &amp; EXTENSIONS</a:t>
+            </a:r>
+          </a:p>
+          <a:p>
+            <a:br/>
             <a:pPr>
-              <a:spcBef>
-                <a:spcPts val="1200"/>
-              </a:spcBef>
-              <a:defRPr sz="1600">
-                <a:solidFill>
-                  <a:srgbClr val="CBD5E1"/>
+              <a:defRPr sz="1200">
+                <a:solidFill>
+                  <a:srgbClr val="94A3B8"/>
                 </a:solidFill>
               </a:defRPr>
             </a:pPr>
             <a:r>
-              <a:t>Enterprise-Grade AI Architecture, Machine Learning Pipeline &amp; Deployment Framework</a:t>
+              <a:t>• Spatial-Temporal Graph Neural Networks: Incorporate Graph Convolutional Networks (GCNs) to model regional cross-city pollutant transport.</a:t>
+            </a:r>
+            <a:br/>
+            <a:br/>
+            <a:r>
+              <a:t>• Satellite Remote Sensing Fusion: Assimilate Sentinel-5P TROPOMI satellite columns (AOD, NO2 troposphere) into model inputs.</a:t>
+            </a:r>
+            <a:br/>
+            <a:br/>
+            <a:r>
+              <a:t>• Physics-Informed Neural Networks (PINNs): Constrain neural predictions with advection-diffusion atmospheric transport equations.</a:t>
+            </a:r>
+            <a:br/>
+            <a:br/>
+            <a:r>
+              <a:t>• Edge IoT Deployment: Quantize PyTorch models to INT8 ONNX runtime for sub-watt micro-station edge deployment.</a:t>
             </a:r>
           </a:p>
         </p:txBody>
@@ -3230,13 +4663,13 @@
         <p:spPr>
           <a:xfrm>
             <a:off x="0" y="0"/>
-            <a:ext cx="12191695" cy="1097280"/>
+            <a:ext cx="12191695" cy="6858000"/>
           </a:xfrm>
           <a:prstGeom prst="rect">
             <a:avLst/>
           </a:prstGeom>
           <a:solidFill>
-            <a:srgbClr val="0F172A"/>
+            <a:srgbClr val="070E17"/>
           </a:solidFill>
           <a:ln>
             <a:noFill/>
@@ -3272,8 +4705,8 @@
         </p:nvSpPr>
         <p:spPr>
           <a:xfrm>
-            <a:off x="731520" y="137160"/>
-            <a:ext cx="10698480" cy="822960"/>
+            <a:off x="731520" y="365760"/>
+            <a:ext cx="10728655" cy="1005840"/>
           </a:xfrm>
           <a:prstGeom prst="rect">
             <a:avLst/>
@@ -3287,132 +4720,190 @@
           <a:lstStyle/>
           <a:p>
             <a:pPr>
-              <a:defRPr sz="2400" b="1">
-                <a:solidFill>
-                  <a:srgbClr val="FFFFFF"/>
+              <a:defRPr sz="1100" b="1">
+                <a:solidFill>
+                  <a:srgbClr val="10B981"/>
                 </a:solidFill>
               </a:defRPr>
             </a:pPr>
             <a:r>
-              <a:t>1. Background &amp; Industrial Motivation</a:t>
+              <a:t>ENVIRONMENTAL MODELING &amp; TIME-SERIES DEEP LEARNING • PROJECT-028</a:t>
             </a:r>
           </a:p>
           <a:p>
             <a:pPr>
-              <a:defRPr sz="1100">
-                <a:solidFill>
-                  <a:srgbClr val="94A3B8"/>
+              <a:defRPr sz="2200" b="1">
+                <a:solidFill>
+                  <a:srgbClr val="F8FAFC"/>
                 </a:solidFill>
               </a:defRPr>
             </a:pPr>
             <a:r>
-              <a:t>Academic &amp; Industrial AI Project Series  |  Project 28 of 55</a:t>
-            </a:r>
-          </a:p>
-        </p:txBody>
-      </p:sp>
-      <p:sp>
-        <p:nvSpPr>
-          <p:cNvPr id="4" name="TextBox 3"/>
-          <p:cNvSpPr txBox="1"/>
+              <a:t>Problem Statement: Urban Air Quality Degradation &amp; Health Crises</a:t>
+            </a:r>
+          </a:p>
+        </p:txBody>
+      </p:sp>
+      <p:sp>
+        <p:nvSpPr>
+          <p:cNvPr id="4" name="Rounded Rectangle 3"/>
+          <p:cNvSpPr/>
           <p:nvPr/>
         </p:nvSpPr>
         <p:spPr>
           <a:xfrm>
-            <a:off x="731520" y="1371600"/>
-            <a:ext cx="10698480" cy="5029200"/>
-          </a:xfrm>
-          <a:prstGeom prst="rect">
+            <a:off x="731520" y="1645920"/>
+            <a:ext cx="5212080" cy="4572000"/>
+          </a:xfrm>
+          <a:prstGeom prst="roundRect">
             <a:avLst/>
           </a:prstGeom>
-          <a:noFill/>
-        </p:spPr>
-        <p:txBody>
-          <a:bodyPr wrap="square">
-            <a:spAutoFit/>
-          </a:bodyPr>
-          <a:lstStyle/>
-          <a:p>
+          <a:solidFill>
+            <a:srgbClr val="0D1B2A"/>
+          </a:solidFill>
+          <a:ln>
+            <a:solidFill>
+              <a:srgbClr val="EF4444"/>
+            </a:solidFill>
+          </a:ln>
+        </p:spPr>
+        <p:style>
+          <a:lnRef idx="1">
+            <a:schemeClr val="accent1"/>
+          </a:lnRef>
+          <a:fillRef idx="3">
+            <a:schemeClr val="accent1"/>
+          </a:fillRef>
+          <a:effectRef idx="2">
+            <a:schemeClr val="accent1"/>
+          </a:effectRef>
+          <a:fontRef idx="minor">
+            <a:schemeClr val="lt1"/>
+          </a:fontRef>
+        </p:style>
+        <p:txBody>
+          <a:bodyPr rtlCol="0" anchor="ctr" wrap="square"/>
+          <a:lstStyle/>
+          <a:p>
+            <a:pPr algn="ctr">
+              <a:defRPr sz="1400" b="1">
+                <a:solidFill>
+                  <a:srgbClr val="EF4444"/>
+                </a:solidFill>
+              </a:defRPr>
+            </a:pPr>
+            <a:r>
+              <a:t>THE URBAN POLLUTION CHALLENGE</a:t>
+            </a:r>
+          </a:p>
+          <a:p>
+            <a:br/>
             <a:pPr>
-              <a:defRPr sz="1800" b="1">
-                <a:solidFill>
-                  <a:srgbClr val="1E3A8A"/>
+              <a:defRPr sz="1200">
+                <a:solidFill>
+                  <a:srgbClr val="94A3B8"/>
                 </a:solidFill>
               </a:defRPr>
             </a:pPr>
             <a:r>
-              <a:t>Executive Problem Background:</a:t>
-            </a:r>
-          </a:p>
-          <a:p>
+              <a:t>• Severe Public Health Hazard: Fine particulate matter (PM2.5) bypasses nasal filters, penetrates deep lung alveoli, and enters systemic circulation.</a:t>
+            </a:r>
+            <a:br/>
+            <a:br/>
+            <a:r>
+              <a:t>• Diurnal &amp; Meteorological Volatility: Particulate concentrations fluctuate wildly due to vehicular rush hours, nighttime boundary layer collapse, and thermal inversions.</a:t>
+            </a:r>
+            <a:br/>
+            <a:br/>
+            <a:r>
+              <a:t>• Reactive vs Predictive Monitoring: Legacy municipal stations report current pollution retrospectively, offering zero advance warning for schools, hospitals, or commuters.</a:t>
+            </a:r>
+            <a:br/>
+            <a:br/>
+            <a:r>
+              <a:t>• Complex Multi-Pollutant Interactions: Gas-phase precursors (NO2, SO2) react photochemically with volatile organics to generate secondary aerosols.</a:t>
+            </a:r>
+          </a:p>
+        </p:txBody>
+      </p:sp>
+      <p:sp>
+        <p:nvSpPr>
+          <p:cNvPr id="5" name="Rounded Rectangle 4"/>
+          <p:cNvSpPr/>
+          <p:nvPr/>
+        </p:nvSpPr>
+        <p:spPr>
+          <a:xfrm>
+            <a:off x="6217920" y="1645920"/>
+            <a:ext cx="5212080" cy="4572000"/>
+          </a:xfrm>
+          <a:prstGeom prst="roundRect">
+            <a:avLst/>
+          </a:prstGeom>
+          <a:solidFill>
+            <a:srgbClr val="0D1B2A"/>
+          </a:solidFill>
+          <a:ln>
+            <a:solidFill>
+              <a:srgbClr val="10B981"/>
+            </a:solidFill>
+          </a:ln>
+        </p:spPr>
+        <p:style>
+          <a:lnRef idx="1">
+            <a:schemeClr val="accent1"/>
+          </a:lnRef>
+          <a:fillRef idx="3">
+            <a:schemeClr val="accent1"/>
+          </a:fillRef>
+          <a:effectRef idx="2">
+            <a:schemeClr val="accent1"/>
+          </a:effectRef>
+          <a:fontRef idx="minor">
+            <a:schemeClr val="lt1"/>
+          </a:fontRef>
+        </p:style>
+        <p:txBody>
+          <a:bodyPr rtlCol="0" anchor="ctr" wrap="square"/>
+          <a:lstStyle/>
+          <a:p>
+            <a:pPr algn="ctr">
+              <a:defRPr sz="1400" b="1">
+                <a:solidFill>
+                  <a:srgbClr val="10B981"/>
+                </a:solidFill>
+              </a:defRPr>
+            </a:pPr>
+            <a:r>
+              <a:t>THE DEEP LEARNING FORECASTING SOLUTION</a:t>
+            </a:r>
+          </a:p>
+          <a:p>
+            <a:br/>
             <a:pPr>
-              <a:spcBef>
-                <a:spcPts val="1000"/>
-              </a:spcBef>
-              <a:defRPr sz="1400">
-                <a:solidFill>
-                  <a:srgbClr val="334155"/>
+              <a:defRPr sz="1200">
+                <a:solidFill>
+                  <a:srgbClr val="94A3B8"/>
                 </a:solidFill>
               </a:defRPr>
             </a:pPr>
             <a:r>
-              <a:t>"AI-Based Air Quality Forecasting and Pollution Level Prediction Using Time-Series Deep Learning is a comprehensive and crucial project aimed at addressing unexpected environmental hazards, public health risks, and air pollution inefficiencies in modern urban and industrial environments. As industrialization and urbanization accelerate, cities increasingly rely on interconnected monitoring networks that continuously generate complex environmental metrics, making them prime targets for sudden haz...</a:t>
-            </a:r>
-          </a:p>
-          <a:p>
-            <a:pPr>
-              <a:spcBef>
-                <a:spcPts val="1400"/>
-              </a:spcBef>
-              <a:defRPr sz="1600" b="1"/>
-            </a:pPr>
-            <a:r>
-              <a:t>Core Industry Drivers:</a:t>
-            </a:r>
-          </a:p>
-          <a:p>
-            <a:pPr>
-              <a:spcBef>
-                <a:spcPts val="400"/>
-              </a:spcBef>
-              <a:defRPr sz="1300">
-                <a:solidFill>
-                  <a:srgbClr val="475569"/>
-                </a:solidFill>
-              </a:defRPr>
-            </a:pPr>
-            <a:r>
-              <a:t>• Manual legacy inspection/decision methods incur high operational costs, delay, and human error.</a:t>
-            </a:r>
-          </a:p>
-          <a:p>
-            <a:pPr>
-              <a:spcBef>
-                <a:spcPts val="400"/>
-              </a:spcBef>
-              <a:defRPr sz="1300">
-                <a:solidFill>
-                  <a:srgbClr val="475569"/>
-                </a:solidFill>
-              </a:defRPr>
-            </a:pPr>
-            <a:r>
-              <a:t>• Scalable automated solutions require low-latency edge and cloud neural network inference.</a:t>
-            </a:r>
-          </a:p>
-          <a:p>
-            <a:pPr>
-              <a:spcBef>
-                <a:spcPts val="400"/>
-              </a:spcBef>
-              <a:defRPr sz="1300">
-                <a:solidFill>
-                  <a:srgbClr val="475569"/>
-                </a:solidFill>
-              </a:defRPr>
-            </a:pPr>
-            <a:r>
-              <a:t>• Explainable prediction confidence metrics are essential for operational trust and regulatory compliance.</a:t>
+              <a:t>• Multi-Step Sequence-to-Sequence Modeling: 2-layer Bi-LSTM captures bidirectional temporal dependencies across past 24-hour meteorological sequences.</a:t>
+            </a:r>
+            <a:br/>
+            <a:br/>
+            <a:r>
+              <a:t>• Proactive Public Health Advisories: Forecasts provide 24-hour and 7-day advance warnings, enabling timely dispatch of N95 advisories and traffic restrictions.</a:t>
+            </a:r>
+            <a:br/>
+            <a:br/>
+            <a:r>
+              <a:t>• Integrated Meteorological Coupling: Models boundary layer height, ambient temperature, humidity, and wind dispersion dynamics alongside emissions.</a:t>
+            </a:r>
+            <a:br/>
+            <a:br/>
+            <a:r>
+              <a:t>• High-Frequency Decision Support: Real-time neural inference executes in 1.96ms, enabling citywide deployment on commodity infrastructure.</a:t>
             </a:r>
           </a:p>
         </p:txBody>
@@ -3444,13 +4935,13 @@
         <p:spPr>
           <a:xfrm>
             <a:off x="0" y="0"/>
-            <a:ext cx="12191695" cy="1097280"/>
+            <a:ext cx="12191695" cy="6858000"/>
           </a:xfrm>
           <a:prstGeom prst="rect">
             <a:avLst/>
           </a:prstGeom>
           <a:solidFill>
-            <a:srgbClr val="0F172A"/>
+            <a:srgbClr val="070E17"/>
           </a:solidFill>
           <a:ln>
             <a:noFill/>
@@ -3486,8 +4977,8 @@
         </p:nvSpPr>
         <p:spPr>
           <a:xfrm>
-            <a:off x="731520" y="137160"/>
-            <a:ext cx="10698480" cy="822960"/>
+            <a:off x="731520" y="365760"/>
+            <a:ext cx="10728655" cy="1005840"/>
           </a:xfrm>
           <a:prstGeom prst="rect">
             <a:avLst/>
@@ -3501,169 +4992,117 @@
           <a:lstStyle/>
           <a:p>
             <a:pPr>
-              <a:defRPr sz="2400" b="1">
-                <a:solidFill>
-                  <a:srgbClr val="FFFFFF"/>
+              <a:defRPr sz="1100" b="1">
+                <a:solidFill>
+                  <a:srgbClr val="10B981"/>
                 </a:solidFill>
               </a:defRPr>
             </a:pPr>
             <a:r>
-              <a:t>2. Problem Statement &amp; Key Objectives</a:t>
+              <a:t>ENVIRONMENTAL MODELING &amp; TIME-SERIES DEEP LEARNING • PROJECT-028</a:t>
             </a:r>
           </a:p>
           <a:p>
             <a:pPr>
-              <a:defRPr sz="1100">
-                <a:solidFill>
-                  <a:srgbClr val="94A3B8"/>
+              <a:defRPr sz="2200" b="1">
+                <a:solidFill>
+                  <a:srgbClr val="F8FAFC"/>
                 </a:solidFill>
               </a:defRPr>
             </a:pPr>
             <a:r>
-              <a:t>Academic &amp; Industrial AI Project Series  |  Project 28 of 55</a:t>
-            </a:r>
-          </a:p>
-        </p:txBody>
-      </p:sp>
-      <p:sp>
-        <p:nvSpPr>
-          <p:cNvPr id="4" name="TextBox 3"/>
-          <p:cNvSpPr txBox="1"/>
+              <a:t>System Architecture: End-to-End Time-Series Deep Learning Pipeline</a:t>
+            </a:r>
+          </a:p>
+        </p:txBody>
+      </p:sp>
+      <p:sp>
+        <p:nvSpPr>
+          <p:cNvPr id="4" name="Rounded Rectangle 3"/>
+          <p:cNvSpPr/>
           <p:nvPr/>
         </p:nvSpPr>
         <p:spPr>
           <a:xfrm>
-            <a:off x="731520" y="1371600"/>
-            <a:ext cx="10698480" cy="5029200"/>
-          </a:xfrm>
-          <a:prstGeom prst="rect">
+            <a:off x="731520" y="1645920"/>
+            <a:ext cx="10728655" cy="4572000"/>
+          </a:xfrm>
+          <a:prstGeom prst="roundRect">
             <a:avLst/>
           </a:prstGeom>
-          <a:noFill/>
-        </p:spPr>
-        <p:txBody>
-          <a:bodyPr wrap="square">
-            <a:spAutoFit/>
-          </a:bodyPr>
-          <a:lstStyle/>
-          <a:p>
+          <a:solidFill>
+            <a:srgbClr val="0D1B2A"/>
+          </a:solidFill>
+          <a:ln>
+            <a:solidFill>
+              <a:srgbClr val="06B6D4"/>
+            </a:solidFill>
+          </a:ln>
+        </p:spPr>
+        <p:style>
+          <a:lnRef idx="1">
+            <a:schemeClr val="accent1"/>
+          </a:lnRef>
+          <a:fillRef idx="3">
+            <a:schemeClr val="accent1"/>
+          </a:fillRef>
+          <a:effectRef idx="2">
+            <a:schemeClr val="accent1"/>
+          </a:effectRef>
+          <a:fontRef idx="minor">
+            <a:schemeClr val="lt1"/>
+          </a:fontRef>
+        </p:style>
+        <p:txBody>
+          <a:bodyPr rtlCol="0" anchor="ctr" wrap="square"/>
+          <a:lstStyle/>
+          <a:p>
+            <a:pPr algn="ctr">
+              <a:defRPr sz="1400" b="1">
+                <a:solidFill>
+                  <a:srgbClr val="06B6D4"/>
+                </a:solidFill>
+              </a:defRPr>
+            </a:pPr>
+            <a:r>
+              <a:t>PIPELINE ORCHESTRATION &amp; COMPONENT TOPOLOGY</a:t>
+            </a:r>
+          </a:p>
+          <a:p>
+            <a:br/>
             <a:pPr>
-              <a:spcBef>
-                <a:spcPts val="800"/>
-              </a:spcBef>
-              <a:defRPr sz="1600" b="1">
-                <a:solidFill>
-                  <a:srgbClr val="10B981"/>
+              <a:defRPr sz="1200">
+                <a:solidFill>
+                  <a:srgbClr val="94A3B8"/>
                 </a:solidFill>
               </a:defRPr>
             </a:pPr>
             <a:r>
-              <a:t>✓ Predictive Accuracy &amp; Generalization</a:t>
-            </a:r>
-          </a:p>
-          <a:p>
-            <a:pPr>
-              <a:spcBef>
-                <a:spcPts val="200"/>
-              </a:spcBef>
-              <a:defRPr sz="1300">
-                <a:solidFill>
-                  <a:srgbClr val="475569"/>
-                </a:solidFill>
-              </a:defRPr>
-            </a:pPr>
-            <a:r>
-              <a:t>Achieve high validation precision across diverse real-world operating distributions.</a:t>
-            </a:r>
-          </a:p>
-          <a:p>
-            <a:pPr>
-              <a:spcBef>
-                <a:spcPts val="800"/>
-              </a:spcBef>
-              <a:defRPr sz="1600" b="1">
-                <a:solidFill>
-                  <a:srgbClr val="10B981"/>
-                </a:solidFill>
-              </a:defRPr>
-            </a:pPr>
-            <a:r>
-              <a:t>✓ Real-Time Low Latency Inference</a:t>
-            </a:r>
-          </a:p>
-          <a:p>
-            <a:pPr>
-              <a:spcBef>
-                <a:spcPts val="200"/>
-              </a:spcBef>
-              <a:defRPr sz="1300">
-                <a:solidFill>
-                  <a:srgbClr val="475569"/>
-                </a:solidFill>
-              </a:defRPr>
-            </a:pPr>
-            <a:r>
-              <a:t>Deliver end-to-end processing response times under 35 milliseconds per query.</a:t>
-            </a:r>
-          </a:p>
-          <a:p>
-            <a:pPr>
-              <a:spcBef>
-                <a:spcPts val="800"/>
-              </a:spcBef>
-              <a:defRPr sz="1600" b="1">
-                <a:solidFill>
-                  <a:srgbClr val="10B981"/>
-                </a:solidFill>
-              </a:defRPr>
-            </a:pPr>
-            <a:r>
-              <a:t>✓ Robust Anomaly &amp; Boundary Handling</a:t>
-            </a:r>
-          </a:p>
-          <a:p>
-            <a:pPr>
-              <a:spcBef>
-                <a:spcPts val="200"/>
-              </a:spcBef>
-              <a:defRPr sz="1300">
-                <a:solidFill>
-                  <a:srgbClr val="475569"/>
-                </a:solidFill>
-              </a:defRPr>
-            </a:pPr>
-            <a:r>
-              <a:t>Detect out-of-distribution instances and reject anomalous inputs with deterministic alerts.</a:t>
-            </a:r>
-          </a:p>
-          <a:p>
-            <a:pPr>
-              <a:spcBef>
-                <a:spcPts val="800"/>
-              </a:spcBef>
-              <a:defRPr sz="1600" b="1">
-                <a:solidFill>
-                  <a:srgbClr val="10B981"/>
-                </a:solidFill>
-              </a:defRPr>
-            </a:pPr>
-            <a:r>
-              <a:t>✓ Production-Ready Full Stack</a:t>
-            </a:r>
-          </a:p>
-          <a:p>
-            <a:pPr>
-              <a:spcBef>
-                <a:spcPts val="200"/>
-              </a:spcBef>
-              <a:defRPr sz="1300">
-                <a:solidFill>
-                  <a:srgbClr val="475569"/>
-                </a:solidFill>
-              </a:defRPr>
-            </a:pPr>
-            <a:r>
-              <a:t>Provide modular REST APIs, audit logging, and responsive user interfaces.</a:t>
+              <a:t>1. Ingestion Layer: Continuous telemetry feeds capturing 10 parameters (PM2.5, PM10, NO2, SO2, CO, O3, Temp, Humidity, Wind, Boundary Layer Height).</a:t>
+            </a:r>
+            <a:br/>
+            <a:r>
+              <a:t>2. Standardization Layer: Z-Score feature normalization via precomputed empirical scalers: z = (x - mu) / sigma.</a:t>
+            </a:r>
+            <a:br/>
+            <a:r>
+              <a:t>3. Temporal Sequence Builder: Sliding window construct packaging 24-hour historical records (shape: 1 x 24 x 10) for recursive sequence modeling.</a:t>
+            </a:r>
+            <a:br/>
+            <a:r>
+              <a:t>4. Deep Bi-LSTM Sequence Forecaster: 2-layer bidirectional LSTM network outputs future 24-hour trajectories of PM2.5, PM10, and composite AQI.</a:t>
+            </a:r>
+            <a:br/>
+            <a:r>
+              <a:t>5. Deep Hazard Classifier: 4-layer feedforward MLP assigns calibrated EPA hazard categories and softmax confidence scores.</a:t>
+            </a:r>
+            <a:br/>
+            <a:r>
+              <a:t>6. Clinical Advisory Generator: Rule-based medical expert system generates targeted lifestyle recommendations (N95 masks, HEPA filtration).</a:t>
+            </a:r>
+            <a:br/>
+            <a:r>
+              <a:t>7. ACID Relational Ledger: Transactional persistence of forecasts, hourly projections, and audit logs into SQLite (air_quality.db).</a:t>
             </a:r>
           </a:p>
         </p:txBody>
@@ -3695,13 +5134,13 @@
         <p:spPr>
           <a:xfrm>
             <a:off x="0" y="0"/>
-            <a:ext cx="12191695" cy="1097280"/>
+            <a:ext cx="12191695" cy="6858000"/>
           </a:xfrm>
           <a:prstGeom prst="rect">
             <a:avLst/>
           </a:prstGeom>
           <a:solidFill>
-            <a:srgbClr val="0F172A"/>
+            <a:srgbClr val="070E17"/>
           </a:solidFill>
           <a:ln>
             <a:noFill/>
@@ -3737,8 +5176,8 @@
         </p:nvSpPr>
         <p:spPr>
           <a:xfrm>
-            <a:off x="731520" y="137160"/>
-            <a:ext cx="10698480" cy="822960"/>
+            <a:off x="731520" y="365760"/>
+            <a:ext cx="10728655" cy="1005840"/>
           </a:xfrm>
           <a:prstGeom prst="rect">
             <a:avLst/>
@@ -3752,184 +5191,210 @@
           <a:lstStyle/>
           <a:p>
             <a:pPr>
-              <a:defRPr sz="2400" b="1">
-                <a:solidFill>
-                  <a:srgbClr val="FFFFFF"/>
+              <a:defRPr sz="1100" b="1">
+                <a:solidFill>
+                  <a:srgbClr val="10B981"/>
                 </a:solidFill>
               </a:defRPr>
             </a:pPr>
             <a:r>
-              <a:t>3. System Architecture &amp; Workflow Pipeline</a:t>
+              <a:t>ENVIRONMENTAL MODELING &amp; TIME-SERIES DEEP LEARNING • PROJECT-028</a:t>
             </a:r>
           </a:p>
           <a:p>
             <a:pPr>
-              <a:defRPr sz="1100">
-                <a:solidFill>
-                  <a:srgbClr val="94A3B8"/>
+              <a:defRPr sz="2200" b="1">
+                <a:solidFill>
+                  <a:srgbClr val="F8FAFC"/>
                 </a:solidFill>
               </a:defRPr>
             </a:pPr>
             <a:r>
-              <a:t>Academic &amp; Industrial AI Project Series  |  Project 28 of 55</a:t>
-            </a:r>
-          </a:p>
-        </p:txBody>
-      </p:sp>
-      <p:sp>
-        <p:nvSpPr>
-          <p:cNvPr id="4" name="TextBox 3"/>
-          <p:cNvSpPr txBox="1"/>
+              <a:t>Neural Forecaster: PyTorch 2-Layer Bidirectional LSTM Architecture</a:t>
+            </a:r>
+          </a:p>
+        </p:txBody>
+      </p:sp>
+      <p:sp>
+        <p:nvSpPr>
+          <p:cNvPr id="4" name="Rounded Rectangle 3"/>
+          <p:cNvSpPr/>
           <p:nvPr/>
         </p:nvSpPr>
         <p:spPr>
           <a:xfrm>
-            <a:off x="731520" y="1371600"/>
-            <a:ext cx="10698480" cy="5029200"/>
-          </a:xfrm>
-          <a:prstGeom prst="rect">
+            <a:off x="731520" y="1645920"/>
+            <a:ext cx="5212080" cy="4572000"/>
+          </a:xfrm>
+          <a:prstGeom prst="roundRect">
             <a:avLst/>
           </a:prstGeom>
-          <a:noFill/>
-        </p:spPr>
-        <p:txBody>
-          <a:bodyPr wrap="square">
-            <a:spAutoFit/>
-          </a:bodyPr>
-          <a:lstStyle/>
-          <a:p>
+          <a:solidFill>
+            <a:srgbClr val="0D1B2A"/>
+          </a:solidFill>
+          <a:ln>
+            <a:solidFill>
+              <a:srgbClr val="10B981"/>
+            </a:solidFill>
+          </a:ln>
+        </p:spPr>
+        <p:style>
+          <a:lnRef idx="1">
+            <a:schemeClr val="accent1"/>
+          </a:lnRef>
+          <a:fillRef idx="3">
+            <a:schemeClr val="accent1"/>
+          </a:fillRef>
+          <a:effectRef idx="2">
+            <a:schemeClr val="accent1"/>
+          </a:effectRef>
+          <a:fontRef idx="minor">
+            <a:schemeClr val="lt1"/>
+          </a:fontRef>
+        </p:style>
+        <p:txBody>
+          <a:bodyPr rtlCol="0" anchor="ctr" wrap="square"/>
+          <a:lstStyle/>
+          <a:p>
+            <a:pPr algn="ctr">
+              <a:defRPr sz="1400" b="1">
+                <a:solidFill>
+                  <a:srgbClr val="10B981"/>
+                </a:solidFill>
+              </a:defRPr>
+            </a:pPr>
+            <a:r>
+              <a:t>BILSTM NETWORK SPECIFICATION</a:t>
+            </a:r>
+          </a:p>
+          <a:p>
+            <a:br/>
             <a:pPr>
-              <a:spcBef>
-                <a:spcPts val="800"/>
-              </a:spcBef>
-              <a:defRPr sz="1500" b="1">
-                <a:solidFill>
-                  <a:srgbClr val="2563EB"/>
+              <a:defRPr sz="1200">
+                <a:solidFill>
+                  <a:srgbClr val="94A3B8"/>
                 </a:solidFill>
               </a:defRPr>
             </a:pPr>
             <a:r>
-              <a:t>[1] Ingestion Layer</a:t>
-            </a:r>
-          </a:p>
-          <a:p>
+              <a:t>• Model Class: AQITimeSeriesBiLSTM(nn.Module)</a:t>
+            </a:r>
+            <a:br/>
+            <a:r>
+              <a:t>• Input Dimension: 10 atmospheric &amp; meteorological features</a:t>
+            </a:r>
+            <a:br/>
+            <a:r>
+              <a:t>• Recurrent Backbone: 2-Layer BiLSTM (hidden_size=64, bidirectional=True)</a:t>
+            </a:r>
+            <a:br/>
+            <a:r>
+              <a:t>• Effective Hidden Dimension: 128 (64 forward + 64 backward)</a:t>
+            </a:r>
+            <a:br/>
+            <a:r>
+              <a:t>• Recurrent Regularization: Dropout = 0.15 between LSTM layers</a:t>
+            </a:r>
+            <a:br/>
+            <a:r>
+              <a:t>• Dense Projection Head: Linear(128, 128) -&gt; ReLU -&gt; Linear(128, 24 * 3)</a:t>
+            </a:r>
+            <a:br/>
+            <a:r>
+              <a:t>• Output Tensor Shape: (Batch, 24 Hours, 3 Features: PM2.5, PM10, AQI)</a:t>
+            </a:r>
+            <a:br/>
+            <a:r>
+              <a:t>• Serialized Weights: backend/aqi_bilstm_weights.pt</a:t>
+            </a:r>
+          </a:p>
+        </p:txBody>
+      </p:sp>
+      <p:sp>
+        <p:nvSpPr>
+          <p:cNvPr id="5" name="Rounded Rectangle 4"/>
+          <p:cNvSpPr/>
+          <p:nvPr/>
+        </p:nvSpPr>
+        <p:spPr>
+          <a:xfrm>
+            <a:off x="6217920" y="1645920"/>
+            <a:ext cx="5212080" cy="4572000"/>
+          </a:xfrm>
+          <a:prstGeom prst="roundRect">
+            <a:avLst/>
+          </a:prstGeom>
+          <a:solidFill>
+            <a:srgbClr val="0D1B2A"/>
+          </a:solidFill>
+          <a:ln>
+            <a:solidFill>
+              <a:srgbClr val="06B6D4"/>
+            </a:solidFill>
+          </a:ln>
+        </p:spPr>
+        <p:style>
+          <a:lnRef idx="1">
+            <a:schemeClr val="accent1"/>
+          </a:lnRef>
+          <a:fillRef idx="3">
+            <a:schemeClr val="accent1"/>
+          </a:fillRef>
+          <a:effectRef idx="2">
+            <a:schemeClr val="accent1"/>
+          </a:effectRef>
+          <a:fontRef idx="minor">
+            <a:schemeClr val="lt1"/>
+          </a:fontRef>
+        </p:style>
+        <p:txBody>
+          <a:bodyPr rtlCol="0" anchor="ctr" wrap="square"/>
+          <a:lstStyle/>
+          <a:p>
+            <a:pPr algn="ctr">
+              <a:defRPr sz="1400" b="1">
+                <a:solidFill>
+                  <a:srgbClr val="06B6D4"/>
+                </a:solidFill>
+              </a:defRPr>
+            </a:pPr>
+            <a:r>
+              <a:t>TRAINING DYNAMICS &amp; HUBER LOSS</a:t>
+            </a:r>
+          </a:p>
+          <a:p>
+            <a:br/>
             <a:pPr>
-              <a:defRPr sz="1300">
-                <a:solidFill>
-                  <a:srgbClr val="475569"/>
+              <a:defRPr sz="1200">
+                <a:solidFill>
+                  <a:srgbClr val="94A3B8"/>
                 </a:solidFill>
               </a:defRPr>
             </a:pPr>
             <a:r>
-              <a:t>Raw telemetry, video feeds, or structured tabular features ingested via secure endpoints.</a:t>
-            </a:r>
-          </a:p>
-          <a:p>
-            <a:pPr>
-              <a:spcBef>
-                <a:spcPts val="800"/>
-              </a:spcBef>
-              <a:defRPr sz="1500" b="1">
-                <a:solidFill>
-                  <a:srgbClr val="2563EB"/>
-                </a:solidFill>
-              </a:defRPr>
-            </a:pPr>
-            <a:r>
-              <a:t>[2] Preprocessing &amp; Normalization</a:t>
-            </a:r>
-          </a:p>
-          <a:p>
-            <a:pPr>
-              <a:defRPr sz="1300">
-                <a:solidFill>
-                  <a:srgbClr val="475569"/>
-                </a:solidFill>
-              </a:defRPr>
-            </a:pPr>
-            <a:r>
-              <a:t>Feature scaling, missing value imputation, winsorization, and tensor reshaping.</a:t>
-            </a:r>
-          </a:p>
-          <a:p>
-            <a:pPr>
-              <a:spcBef>
-                <a:spcPts val="800"/>
-              </a:spcBef>
-              <a:defRPr sz="1500" b="1">
-                <a:solidFill>
-                  <a:srgbClr val="2563EB"/>
-                </a:solidFill>
-              </a:defRPr>
-            </a:pPr>
-            <a:r>
-              <a:t>[3] Deep Neural Inference Engine</a:t>
-            </a:r>
-          </a:p>
-          <a:p>
-            <a:pPr>
-              <a:defRPr sz="1300">
-                <a:solidFill>
-                  <a:srgbClr val="475569"/>
-                </a:solidFill>
-              </a:defRPr>
-            </a:pPr>
-            <a:r>
-              <a:t>Optimized model evaluating representations with GPU/MPS/CPU acceleration.</a:t>
-            </a:r>
-          </a:p>
-          <a:p>
-            <a:pPr>
-              <a:spcBef>
-                <a:spcPts val="800"/>
-              </a:spcBef>
-              <a:defRPr sz="1500" b="1">
-                <a:solidFill>
-                  <a:srgbClr val="2563EB"/>
-                </a:solidFill>
-              </a:defRPr>
-            </a:pPr>
-            <a:r>
-              <a:t>[4] Post-Processing &amp; Decision Support</a:t>
-            </a:r>
-          </a:p>
-          <a:p>
-            <a:pPr>
-              <a:defRPr sz="1300">
-                <a:solidFill>
-                  <a:srgbClr val="475569"/>
-                </a:solidFill>
-              </a:defRPr>
-            </a:pPr>
-            <a:r>
-              <a:t>Threshold calibration, confidence scoring, classification/regression output formatting.</a:t>
-            </a:r>
-          </a:p>
-          <a:p>
-            <a:pPr>
-              <a:spcBef>
-                <a:spcPts val="800"/>
-              </a:spcBef>
-              <a:defRPr sz="1500" b="1">
-                <a:solidFill>
-                  <a:srgbClr val="2563EB"/>
-                </a:solidFill>
-              </a:defRPr>
-            </a:pPr>
-            <a:r>
-              <a:t>[5] Visualization &amp; Persistence</a:t>
-            </a:r>
-          </a:p>
-          <a:p>
-            <a:pPr>
-              <a:defRPr sz="1300">
-                <a:solidFill>
-                  <a:srgbClr val="475569"/>
-                </a:solidFill>
-              </a:defRPr>
-            </a:pPr>
-            <a:r>
-              <a:t>Interactive UI dashboard rendering metrics and SQLite/PostgreSQL audit logging.</a:t>
+              <a:t>• Huber Loss Objective (Smooth L1 Loss with delta = 10.0):</a:t>
+            </a:r>
+            <a:br/>
+            <a:r>
+              <a:t>  L_delta(y, y_hat) = 0.5 * (y - y_hat)^2 if |y - y_hat| &lt;= delta</a:t>
+            </a:r>
+            <a:br/>
+            <a:r>
+              <a:t>  else delta * (|y - y_hat| - 0.5 * delta)</a:t>
+            </a:r>
+            <a:br/>
+            <a:br/>
+            <a:r>
+              <a:t>• Robustness to Smog Outliers: Quadratic penalty for small forecasting errors; linear penalty for extreme episodic spikes prevents gradient explosion.</a:t>
+            </a:r>
+            <a:br/>
+            <a:br/>
+            <a:r>
+              <a:t>• Optimization: Adam optimizer (lr = 0.005) over 5,030 sliding sequence pairs.</a:t>
+            </a:r>
+            <a:br/>
+            <a:r>
+              <a:t>• Convergence: Huber loss reduced from 145.2 to 74.1 across 20 training epochs.</a:t>
             </a:r>
           </a:p>
         </p:txBody>
@@ -3961,13 +5426,13 @@
         <p:spPr>
           <a:xfrm>
             <a:off x="0" y="0"/>
-            <a:ext cx="12191695" cy="1097280"/>
+            <a:ext cx="12191695" cy="6858000"/>
           </a:xfrm>
           <a:prstGeom prst="rect">
             <a:avLst/>
           </a:prstGeom>
           <a:solidFill>
-            <a:srgbClr val="0F172A"/>
+            <a:srgbClr val="070E17"/>
           </a:solidFill>
           <a:ln>
             <a:noFill/>
@@ -4003,8 +5468,8 @@
         </p:nvSpPr>
         <p:spPr>
           <a:xfrm>
-            <a:off x="731520" y="137160"/>
-            <a:ext cx="10698480" cy="822960"/>
+            <a:off x="731520" y="365760"/>
+            <a:ext cx="10728655" cy="1005840"/>
           </a:xfrm>
           <a:prstGeom prst="rect">
             <a:avLst/>
@@ -4018,157 +5483,204 @@
           <a:lstStyle/>
           <a:p>
             <a:pPr>
-              <a:defRPr sz="2400" b="1">
-                <a:solidFill>
-                  <a:srgbClr val="FFFFFF"/>
+              <a:defRPr sz="1100" b="1">
+                <a:solidFill>
+                  <a:srgbClr val="10B981"/>
                 </a:solidFill>
               </a:defRPr>
             </a:pPr>
             <a:r>
-              <a:t>4. Deep Learning &amp; ML Methodology</a:t>
+              <a:t>ENVIRONMENTAL MODELING &amp; TIME-SERIES DEEP LEARNING • PROJECT-028</a:t>
             </a:r>
           </a:p>
           <a:p>
             <a:pPr>
-              <a:defRPr sz="1100">
-                <a:solidFill>
-                  <a:srgbClr val="94A3B8"/>
+              <a:defRPr sz="2200" b="1">
+                <a:solidFill>
+                  <a:srgbClr val="F8FAFC"/>
                 </a:solidFill>
               </a:defRPr>
             </a:pPr>
             <a:r>
-              <a:t>Academic &amp; Industrial AI Project Series  |  Project 28 of 55</a:t>
-            </a:r>
-          </a:p>
-        </p:txBody>
-      </p:sp>
-      <p:sp>
-        <p:nvSpPr>
-          <p:cNvPr id="4" name="TextBox 3"/>
-          <p:cNvSpPr txBox="1"/>
+              <a:t>Hazard Classifier: 4-Layer Deep Neural Categorization Engine</a:t>
+            </a:r>
+          </a:p>
+        </p:txBody>
+      </p:sp>
+      <p:sp>
+        <p:nvSpPr>
+          <p:cNvPr id="4" name="Rounded Rectangle 3"/>
+          <p:cNvSpPr/>
           <p:nvPr/>
         </p:nvSpPr>
         <p:spPr>
           <a:xfrm>
-            <a:off x="731520" y="1371600"/>
-            <a:ext cx="10698480" cy="5029200"/>
-          </a:xfrm>
-          <a:prstGeom prst="rect">
+            <a:off x="731520" y="1645920"/>
+            <a:ext cx="5212080" cy="4572000"/>
+          </a:xfrm>
+          <a:prstGeom prst="roundRect">
             <a:avLst/>
           </a:prstGeom>
-          <a:noFill/>
-        </p:spPr>
-        <p:txBody>
-          <a:bodyPr wrap="square">
-            <a:spAutoFit/>
-          </a:bodyPr>
-          <a:lstStyle/>
-          <a:p>
+          <a:solidFill>
+            <a:srgbClr val="0D1B2A"/>
+          </a:solidFill>
+          <a:ln>
+            <a:solidFill>
+              <a:srgbClr val="F59E0B"/>
+            </a:solidFill>
+          </a:ln>
+        </p:spPr>
+        <p:style>
+          <a:lnRef idx="1">
+            <a:schemeClr val="accent1"/>
+          </a:lnRef>
+          <a:fillRef idx="3">
+            <a:schemeClr val="accent1"/>
+          </a:fillRef>
+          <a:effectRef idx="2">
+            <a:schemeClr val="accent1"/>
+          </a:effectRef>
+          <a:fontRef idx="minor">
+            <a:schemeClr val="lt1"/>
+          </a:fontRef>
+        </p:style>
+        <p:txBody>
+          <a:bodyPr rtlCol="0" anchor="ctr" wrap="square"/>
+          <a:lstStyle/>
+          <a:p>
+            <a:pPr algn="ctr">
+              <a:defRPr sz="1400" b="1">
+                <a:solidFill>
+                  <a:srgbClr val="F59E0B"/>
+                </a:solidFill>
+              </a:defRPr>
+            </a:pPr>
+            <a:r>
+              <a:t>CLASSIFIER TOPOLOGY &amp; REGULARIZATION</a:t>
+            </a:r>
+          </a:p>
+          <a:p>
+            <a:br/>
             <a:pPr>
-              <a:spcBef>
-                <a:spcPts val="800"/>
-              </a:spcBef>
-              <a:defRPr sz="1500" b="1">
-                <a:solidFill>
-                  <a:srgbClr val="0F172A"/>
+              <a:defRPr sz="1200">
+                <a:solidFill>
+                  <a:srgbClr val="94A3B8"/>
                 </a:solidFill>
               </a:defRPr>
             </a:pPr>
             <a:r>
-              <a:t>• Feature Engineering &amp; Dimensionality Alignment</a:t>
-            </a:r>
-          </a:p>
-          <a:p>
+              <a:t>• Model Class: AQIHazardClassifier(nn.Module)</a:t>
+            </a:r>
+            <a:br/>
+            <a:r>
+              <a:t>• Layer 1: Linear(10, 64) + BatchNorm1d(64) + LeakyReLU(0.1) + Dropout(0.15)</a:t>
+            </a:r>
+            <a:br/>
+            <a:r>
+              <a:t>• Layer 2: Linear(64, 48) + BatchNorm1d(48) + LeakyReLU(0.1) + Dropout(0.10)</a:t>
+            </a:r>
+            <a:br/>
+            <a:r>
+              <a:t>• Layer 3: Linear(48, 6) producing raw class logits</a:t>
+            </a:r>
+            <a:br/>
+            <a:r>
+              <a:t>• Output Activation: Softmax generating probability distribution P(c | x)</a:t>
+            </a:r>
+            <a:br/>
+            <a:r>
+              <a:t>• Test Evaluation: 93.73% accuracy on 1,100 unseen atmospheric vectors</a:t>
+            </a:r>
+            <a:br/>
+            <a:r>
+              <a:t>• Serialized Weights: backend/aqi_classifier_weights.pt</a:t>
+            </a:r>
+          </a:p>
+        </p:txBody>
+      </p:sp>
+      <p:sp>
+        <p:nvSpPr>
+          <p:cNvPr id="5" name="Rounded Rectangle 4"/>
+          <p:cNvSpPr/>
+          <p:nvPr/>
+        </p:nvSpPr>
+        <p:spPr>
+          <a:xfrm>
+            <a:off x="6217920" y="1645920"/>
+            <a:ext cx="5212080" cy="4572000"/>
+          </a:xfrm>
+          <a:prstGeom prst="roundRect">
+            <a:avLst/>
+          </a:prstGeom>
+          <a:solidFill>
+            <a:srgbClr val="0D1B2A"/>
+          </a:solidFill>
+          <a:ln>
+            <a:solidFill>
+              <a:srgbClr val="EF4444"/>
+            </a:solidFill>
+          </a:ln>
+        </p:spPr>
+        <p:style>
+          <a:lnRef idx="1">
+            <a:schemeClr val="accent1"/>
+          </a:lnRef>
+          <a:fillRef idx="3">
+            <a:schemeClr val="accent1"/>
+          </a:fillRef>
+          <a:effectRef idx="2">
+            <a:schemeClr val="accent1"/>
+          </a:effectRef>
+          <a:fontRef idx="minor">
+            <a:schemeClr val="lt1"/>
+          </a:fontRef>
+        </p:style>
+        <p:txBody>
+          <a:bodyPr rtlCol="0" anchor="ctr" wrap="square"/>
+          <a:lstStyle/>
+          <a:p>
+            <a:pPr algn="ctr">
+              <a:defRPr sz="1400" b="1">
+                <a:solidFill>
+                  <a:srgbClr val="EF4444"/>
+                </a:solidFill>
+              </a:defRPr>
+            </a:pPr>
+            <a:r>
+              <a:t>EPA AQI OPERATIONAL TAXONOMY</a:t>
+            </a:r>
+          </a:p>
+          <a:p>
+            <a:br/>
             <a:pPr>
-              <a:defRPr sz="1300">
-                <a:solidFill>
-                  <a:srgbClr val="475569"/>
+              <a:defRPr sz="1200">
+                <a:solidFill>
+                  <a:srgbClr val="94A3B8"/>
                 </a:solidFill>
               </a:defRPr>
             </a:pPr>
             <a:r>
-              <a:t>Domain-specific feature extraction, temporal windowing, and embedding vectors.</a:t>
-            </a:r>
-          </a:p>
-          <a:p>
-            <a:pPr>
-              <a:spcBef>
-                <a:spcPts val="800"/>
-              </a:spcBef>
-              <a:defRPr sz="1500" b="1">
-                <a:solidFill>
-                  <a:srgbClr val="0F172A"/>
-                </a:solidFill>
-              </a:defRPr>
-            </a:pPr>
-            <a:r>
-              <a:t>• Model Family &amp; Optimization</a:t>
-            </a:r>
-          </a:p>
-          <a:p>
-            <a:pPr>
-              <a:defRPr sz="1300">
-                <a:solidFill>
-                  <a:srgbClr val="475569"/>
-                </a:solidFill>
-              </a:defRPr>
-            </a:pPr>
-            <a:r>
-              <a:t>Ensemble gradient boosting or deep neural networks trained with AdamW and adaptive LR scheduling.</a:t>
-            </a:r>
-          </a:p>
-          <a:p>
-            <a:pPr>
-              <a:spcBef>
-                <a:spcPts val="800"/>
-              </a:spcBef>
-              <a:defRPr sz="1500" b="1">
-                <a:solidFill>
-                  <a:srgbClr val="0F172A"/>
-                </a:solidFill>
-              </a:defRPr>
-            </a:pPr>
-            <a:r>
-              <a:t>• Overfitting Mitigation</a:t>
-            </a:r>
-          </a:p>
-          <a:p>
-            <a:pPr>
-              <a:defRPr sz="1300">
-                <a:solidFill>
-                  <a:srgbClr val="475569"/>
-                </a:solidFill>
-              </a:defRPr>
-            </a:pPr>
-            <a:r>
-              <a:t>Stratified k-fold cross-validation, dropout layers, early stopping, and data augmentation.</a:t>
-            </a:r>
-          </a:p>
-          <a:p>
-            <a:pPr>
-              <a:spcBef>
-                <a:spcPts val="800"/>
-              </a:spcBef>
-              <a:defRPr sz="1500" b="1">
-                <a:solidFill>
-                  <a:srgbClr val="0F172A"/>
-                </a:solidFill>
-              </a:defRPr>
-            </a:pPr>
-            <a:r>
-              <a:t>• Explainability &amp; Auditability</a:t>
-            </a:r>
-          </a:p>
-          <a:p>
-            <a:pPr>
-              <a:defRPr sz="1300">
-                <a:solidFill>
-                  <a:srgbClr val="475569"/>
-                </a:solidFill>
-              </a:defRPr>
-            </a:pPr>
-            <a:r>
-              <a:t>Confidence scores and feature importance attributions for high-stakes decisions.</a:t>
+              <a:t>1. Good (AQI 0 - 50): Minimal or zero health risk; pristine baseline.</a:t>
+            </a:r>
+            <a:br/>
+            <a:r>
+              <a:t>2. Moderate (AQI 51 - 100): Acceptable air quality; sensitive respiratory alert.</a:t>
+            </a:r>
+            <a:br/>
+            <a:r>
+              <a:t>3. Unhealthy for Sensitive Groups (AQI 101 - 150): Children/elderly caution.</a:t>
+            </a:r>
+            <a:br/>
+            <a:r>
+              <a:t>4. Unhealthy (AQI 151 - 200): Broad population health effects; jogging caution.</a:t>
+            </a:r>
+            <a:br/>
+            <a:r>
+              <a:t>5. Very Unhealthy (AQI 201 - 300): Health alert; serious pulmonary risk.</a:t>
+            </a:r>
+            <a:br/>
+            <a:r>
+              <a:t>6. Hazardous (AQI 301 - 500): Emergency conditions; entire populace affected.</a:t>
             </a:r>
           </a:p>
         </p:txBody>
@@ -4200,13 +5712,13 @@
         <p:spPr>
           <a:xfrm>
             <a:off x="0" y="0"/>
-            <a:ext cx="12191695" cy="1097280"/>
+            <a:ext cx="12191695" cy="6858000"/>
           </a:xfrm>
           <a:prstGeom prst="rect">
             <a:avLst/>
           </a:prstGeom>
           <a:solidFill>
-            <a:srgbClr val="0F172A"/>
+            <a:srgbClr val="070E17"/>
           </a:solidFill>
           <a:ln>
             <a:noFill/>
@@ -4242,8 +5754,8 @@
         </p:nvSpPr>
         <p:spPr>
           <a:xfrm>
-            <a:off x="731520" y="137160"/>
-            <a:ext cx="10698480" cy="822960"/>
+            <a:off x="731520" y="365760"/>
+            <a:ext cx="10728655" cy="1005840"/>
           </a:xfrm>
           <a:prstGeom prst="rect">
             <a:avLst/>
@@ -4257,17 +5769,84 @@
           <a:lstStyle/>
           <a:p>
             <a:pPr>
-              <a:defRPr sz="2400" b="1">
-                <a:solidFill>
-                  <a:srgbClr val="FFFFFF"/>
+              <a:defRPr sz="1100" b="1">
+                <a:solidFill>
+                  <a:srgbClr val="10B981"/>
                 </a:solidFill>
               </a:defRPr>
             </a:pPr>
             <a:r>
-              <a:t>5. Experimental Results &amp; Performance Benchmarks</a:t>
-            </a:r>
-          </a:p>
-          <a:p>
+              <a:t>ENVIRONMENTAL MODELING &amp; TIME-SERIES DEEP LEARNING • PROJECT-028</a:t>
+            </a:r>
+          </a:p>
+          <a:p>
+            <a:pPr>
+              <a:defRPr sz="2200" b="1">
+                <a:solidFill>
+                  <a:srgbClr val="F8FAFC"/>
+                </a:solidFill>
+              </a:defRPr>
+            </a:pPr>
+            <a:r>
+              <a:t>Curated Atmospheric Dataset: 5,500 Records Across 10 Global Metros</a:t>
+            </a:r>
+          </a:p>
+        </p:txBody>
+      </p:sp>
+      <p:sp>
+        <p:nvSpPr>
+          <p:cNvPr id="4" name="Rounded Rectangle 3"/>
+          <p:cNvSpPr/>
+          <p:nvPr/>
+        </p:nvSpPr>
+        <p:spPr>
+          <a:xfrm>
+            <a:off x="731520" y="1645920"/>
+            <a:ext cx="10728655" cy="4572000"/>
+          </a:xfrm>
+          <a:prstGeom prst="roundRect">
+            <a:avLst/>
+          </a:prstGeom>
+          <a:solidFill>
+            <a:srgbClr val="0D1B2A"/>
+          </a:solidFill>
+          <a:ln>
+            <a:solidFill>
+              <a:srgbClr val="06B6D4"/>
+            </a:solidFill>
+          </a:ln>
+        </p:spPr>
+        <p:style>
+          <a:lnRef idx="1">
+            <a:schemeClr val="accent1"/>
+          </a:lnRef>
+          <a:fillRef idx="3">
+            <a:schemeClr val="accent1"/>
+          </a:fillRef>
+          <a:effectRef idx="2">
+            <a:schemeClr val="accent1"/>
+          </a:effectRef>
+          <a:fontRef idx="minor">
+            <a:schemeClr val="lt1"/>
+          </a:fontRef>
+        </p:style>
+        <p:txBody>
+          <a:bodyPr rtlCol="0" anchor="ctr" wrap="square"/>
+          <a:lstStyle/>
+          <a:p>
+            <a:pPr algn="ctr">
+              <a:defRPr sz="1400" b="1">
+                <a:solidFill>
+                  <a:srgbClr val="06B6D4"/>
+                </a:solidFill>
+              </a:defRPr>
+            </a:pPr>
+            <a:r>
+              <a:t>MONITORING STATIONS &amp; GEOGRAPHIC DIVERSITY</a:t>
+            </a:r>
+          </a:p>
+          <a:p>
+            <a:br/>
             <a:pPr>
               <a:defRPr sz="1100">
                 <a:solidFill>
@@ -4276,90 +5855,52 @@
               </a:defRPr>
             </a:pPr>
             <a:r>
-              <a:t>Academic &amp; Industrial AI Project Series  |  Project 28 of 55</a:t>
-            </a:r>
-          </a:p>
-        </p:txBody>
-      </p:sp>
-      <p:sp>
-        <p:nvSpPr>
-          <p:cNvPr id="4" name="TextBox 3"/>
-          <p:cNvSpPr txBox="1"/>
-          <p:nvPr/>
-        </p:nvSpPr>
-        <p:spPr>
-          <a:xfrm>
-            <a:off x="731520" y="1371600"/>
-            <a:ext cx="10698480" cy="5029200"/>
-          </a:xfrm>
-          <a:prstGeom prst="rect">
-            <a:avLst/>
-          </a:prstGeom>
-          <a:noFill/>
-        </p:spPr>
-        <p:txBody>
-          <a:bodyPr wrap="square">
-            <a:spAutoFit/>
-          </a:bodyPr>
-          <a:lstStyle/>
-          <a:p>
-            <a:pPr>
-              <a:spcBef>
-                <a:spcPts val="1200"/>
-              </a:spcBef>
-              <a:defRPr sz="1500" b="1">
-                <a:solidFill>
-                  <a:srgbClr val="10B981"/>
-                </a:solidFill>
-              </a:defRPr>
-            </a:pPr>
-            <a:r>
-              <a:t>★ Validation Accuracy / Score: Achieved 94.8% on independent validation test holdout partitions.</a:t>
-            </a:r>
-          </a:p>
-          <a:p>
-            <a:pPr>
-              <a:spcBef>
-                <a:spcPts val="1200"/>
-              </a:spcBef>
-              <a:defRPr sz="1500" b="1">
-                <a:solidFill>
-                  <a:srgbClr val="10B981"/>
-                </a:solidFill>
-              </a:defRPr>
-            </a:pPr>
-            <a:r>
-              <a:t>★ F1-Score / Macro Precision: Balanced metric of 0.932 across positive and negative classification targets.</a:t>
-            </a:r>
-          </a:p>
-          <a:p>
-            <a:pPr>
-              <a:spcBef>
-                <a:spcPts val="1200"/>
-              </a:spcBef>
-              <a:defRPr sz="1500" b="1">
-                <a:solidFill>
-                  <a:srgbClr val="10B981"/>
-                </a:solidFill>
-              </a:defRPr>
-            </a:pPr>
-            <a:r>
-              <a:t>★ Inference Latency Profile: Median latency of 18.4 ms per inference query on edge CPU hardware.</a:t>
-            </a:r>
-          </a:p>
-          <a:p>
-            <a:pPr>
-              <a:spcBef>
-                <a:spcPts val="1200"/>
-              </a:spcBef>
-              <a:defRPr sz="1500" b="1">
-                <a:solidFill>
-                  <a:srgbClr val="10B981"/>
-                </a:solidFill>
-              </a:defRPr>
-            </a:pPr>
-            <a:r>
-              <a:t>★ False Positive Rate (FPR): Maintained below 2.8%, satisfying stringent operational false alarm constraints.</a:t>
+              <a:t>• Geographic Scope: 10 world stations spanning diverse climatic zones across Asia, Europe, and North America:</a:t>
+            </a:r>
+            <a:br/>
+            <a:r>
+              <a:t>  - ST-DEL-01 (Delhi, NCR): Landlocked continental winter inversion basin; baseline AQI 235 (Smog peaks &gt; 400)</a:t>
+            </a:r>
+            <a:br/>
+            <a:r>
+              <a:t>  - ST-BOM-02 (Mumbai, Coastal): High humidity (78%) maritime dispersion corridor; baseline AQI 128</a:t>
+            </a:r>
+            <a:br/>
+            <a:r>
+              <a:t>  - ST-BLR-03 (Bengaluru, Plateau): Elevated terrain (920m) moderate temperate baseline; AQI 68</a:t>
+            </a:r>
+            <a:br/>
+            <a:r>
+              <a:t>  - ST-MAA-04 (Chennai, Southern Bay): Maritime Bay of Bengal coastal winds (15.2 km/h); baseline AQI 82</a:t>
+            </a:r>
+            <a:br/>
+            <a:r>
+              <a:t>  - ST-CCU-05 (Kolkata, Eastern Hub): Gangetic alluvial plain high moisture corridor; baseline AQI 164</a:t>
+            </a:r>
+            <a:br/>
+            <a:r>
+              <a:t>  - ST-HYD-06 (Hyderabad, Deccan): Semi-arid Deccan plateau atmospheric profile; baseline AQI 105</a:t>
+            </a:r>
+            <a:br/>
+            <a:r>
+              <a:t>  - ST-LON-07 (London, UK): Maritime temperate Atlantic airflows; baseline AQI 42</a:t>
+            </a:r>
+            <a:br/>
+            <a:r>
+              <a:t>  - ST-NYC-08 (New York, USA): Coastal urban corridor with high boundary layer ventilation; baseline AQI 48</a:t>
+            </a:r>
+            <a:br/>
+            <a:r>
+              <a:t>  - ST-TYO-09 (Tokyo, Japan): Pacific oceanic dispersion and strict vehicular emissions; baseline AQI 35</a:t>
+            </a:r>
+            <a:br/>
+            <a:r>
+              <a:t>  - ST-PAR-10 (Paris, France): Western European continental climate baseline; baseline AQI 52</a:t>
+            </a:r>
+            <a:br/>
+            <a:br/>
+            <a:r>
+              <a:t>• Dataset Artifacts: air_quality_timeseries.csv &amp; air_quality_timeseries.json (5,500 hourly records with full stoichiometric fields)</a:t>
             </a:r>
           </a:p>
         </p:txBody>
@@ -4391,13 +5932,13 @@
         <p:spPr>
           <a:xfrm>
             <a:off x="0" y="0"/>
-            <a:ext cx="12191695" cy="1097280"/>
+            <a:ext cx="12191695" cy="6858000"/>
           </a:xfrm>
           <a:prstGeom prst="rect">
             <a:avLst/>
           </a:prstGeom>
           <a:solidFill>
-            <a:srgbClr val="0F172A"/>
+            <a:srgbClr val="070E17"/>
           </a:solidFill>
           <a:ln>
             <a:noFill/>
@@ -4433,8 +5974,8 @@
         </p:nvSpPr>
         <p:spPr>
           <a:xfrm>
-            <a:off x="731520" y="137160"/>
-            <a:ext cx="10698480" cy="822960"/>
+            <a:off x="731520" y="365760"/>
+            <a:ext cx="10728655" cy="1005840"/>
           </a:xfrm>
           <a:prstGeom prst="rect">
             <a:avLst/>
@@ -4448,157 +5989,137 @@
           <a:lstStyle/>
           <a:p>
             <a:pPr>
-              <a:defRPr sz="2400" b="1">
-                <a:solidFill>
-                  <a:srgbClr val="FFFFFF"/>
+              <a:defRPr sz="1100" b="1">
+                <a:solidFill>
+                  <a:srgbClr val="10B981"/>
                 </a:solidFill>
               </a:defRPr>
             </a:pPr>
             <a:r>
-              <a:t>6. Technology Stack &amp; Production Deployment</a:t>
+              <a:t>ENVIRONMENTAL MODELING &amp; TIME-SERIES DEEP LEARNING • PROJECT-028</a:t>
             </a:r>
           </a:p>
           <a:p>
             <a:pPr>
-              <a:defRPr sz="1100">
-                <a:solidFill>
-                  <a:srgbClr val="94A3B8"/>
+              <a:defRPr sz="2200" b="1">
+                <a:solidFill>
+                  <a:srgbClr val="F8FAFC"/>
                 </a:solidFill>
               </a:defRPr>
             </a:pPr>
             <a:r>
-              <a:t>Academic &amp; Industrial AI Project Series  |  Project 28 of 55</a:t>
-            </a:r>
-          </a:p>
-        </p:txBody>
-      </p:sp>
-      <p:sp>
-        <p:nvSpPr>
-          <p:cNvPr id="4" name="TextBox 3"/>
-          <p:cNvSpPr txBox="1"/>
+              <a:t>Web Interface &amp; Telemetry Dashboard: Real-Time Air Quality Portal</a:t>
+            </a:r>
+          </a:p>
+        </p:txBody>
+      </p:sp>
+      <p:pic>
+        <p:nvPicPr>
+          <p:cNvPr id="4" name="Picture 3" descr="01_aqi_monitoring_dashboard.png"/>
+          <p:cNvPicPr>
+            <a:picLocks noChangeAspect="1"/>
+          </p:cNvPicPr>
           <p:nvPr/>
-        </p:nvSpPr>
-        <p:spPr>
-          <a:xfrm>
-            <a:off x="731520" y="1371600"/>
-            <a:ext cx="10698480" cy="5029200"/>
+        </p:nvPicPr>
+        <p:blipFill>
+          <a:blip r:embed="rId2"/>
+          <a:stretch>
+            <a:fillRect/>
+          </a:stretch>
+        </p:blipFill>
+        <p:spPr>
+          <a:xfrm>
+            <a:off x="731520" y="1645920"/>
+            <a:ext cx="6583680" cy="4114800"/>
           </a:xfrm>
           <a:prstGeom prst="rect">
             <a:avLst/>
           </a:prstGeom>
-          <a:noFill/>
-        </p:spPr>
-        <p:txBody>
-          <a:bodyPr wrap="square">
-            <a:spAutoFit/>
-          </a:bodyPr>
-          <a:lstStyle/>
-          <a:p>
+        </p:spPr>
+      </p:pic>
+      <p:sp>
+        <p:nvSpPr>
+          <p:cNvPr id="5" name="Rounded Rectangle 4"/>
+          <p:cNvSpPr/>
+          <p:nvPr/>
+        </p:nvSpPr>
+        <p:spPr>
+          <a:xfrm>
+            <a:off x="7589520" y="1645920"/>
+            <a:ext cx="3840480" cy="4572000"/>
+          </a:xfrm>
+          <a:prstGeom prst="roundRect">
+            <a:avLst/>
+          </a:prstGeom>
+          <a:solidFill>
+            <a:srgbClr val="0D1B2A"/>
+          </a:solidFill>
+          <a:ln>
+            <a:solidFill>
+              <a:srgbClr val="10B981"/>
+            </a:solidFill>
+          </a:ln>
+        </p:spPr>
+        <p:style>
+          <a:lnRef idx="1">
+            <a:schemeClr val="accent1"/>
+          </a:lnRef>
+          <a:fillRef idx="3">
+            <a:schemeClr val="accent1"/>
+          </a:fillRef>
+          <a:effectRef idx="2">
+            <a:schemeClr val="accent1"/>
+          </a:effectRef>
+          <a:fontRef idx="minor">
+            <a:schemeClr val="lt1"/>
+          </a:fontRef>
+        </p:style>
+        <p:txBody>
+          <a:bodyPr rtlCol="0" anchor="ctr" wrap="square"/>
+          <a:lstStyle/>
+          <a:p>
+            <a:pPr algn="ctr">
+              <a:defRPr sz="1300" b="1">
+                <a:solidFill>
+                  <a:srgbClr val="10B981"/>
+                </a:solidFill>
+              </a:defRPr>
+            </a:pPr>
+            <a:r>
+              <a:t>PORTAL TELEMETRY &amp; FEATURES</a:t>
+            </a:r>
+          </a:p>
+          <a:p>
+            <a:br/>
             <a:pPr>
-              <a:spcBef>
-                <a:spcPts val="800"/>
-              </a:spcBef>
-              <a:defRPr sz="1500" b="1">
-                <a:solidFill>
-                  <a:srgbClr val="1E3A8A"/>
+              <a:defRPr sz="1100">
+                <a:solidFill>
+                  <a:srgbClr val="94A3B8"/>
                 </a:solidFill>
               </a:defRPr>
             </a:pPr>
             <a:r>
-              <a:t>⚙ Core Machine Learning Framework</a:t>
-            </a:r>
-          </a:p>
-          <a:p>
-            <a:pPr>
-              <a:defRPr sz="1300">
-                <a:solidFill>
-                  <a:srgbClr val="475569"/>
-                </a:solidFill>
-              </a:defRPr>
-            </a:pPr>
-            <a:r>
-              <a:t>PyTorch 2.0+ / Scikit-learn / HuggingFace Transformers / OpenCV</a:t>
-            </a:r>
-          </a:p>
-          <a:p>
-            <a:pPr>
-              <a:spcBef>
-                <a:spcPts val="800"/>
-              </a:spcBef>
-              <a:defRPr sz="1500" b="1">
-                <a:solidFill>
-                  <a:srgbClr val="1E3A8A"/>
-                </a:solidFill>
-              </a:defRPr>
-            </a:pPr>
-            <a:r>
-              <a:t>⚙ Asynchronous REST Backend</a:t>
-            </a:r>
-          </a:p>
-          <a:p>
-            <a:pPr>
-              <a:defRPr sz="1300">
-                <a:solidFill>
-                  <a:srgbClr val="475569"/>
-                </a:solidFill>
-              </a:defRPr>
-            </a:pPr>
-            <a:r>
-              <a:t>FastAPI / Uvicorn ASGI Server / Pydantic V2 Type Safety</a:t>
-            </a:r>
-          </a:p>
-          <a:p>
-            <a:pPr>
-              <a:spcBef>
-                <a:spcPts val="800"/>
-              </a:spcBef>
-              <a:defRPr sz="1500" b="1">
-                <a:solidFill>
-                  <a:srgbClr val="1E3A8A"/>
-                </a:solidFill>
-              </a:defRPr>
-            </a:pPr>
-            <a:r>
-              <a:t>⚙ Data Persistence &amp; Storage</a:t>
-            </a:r>
-          </a:p>
-          <a:p>
-            <a:pPr>
-              <a:defRPr sz="1300">
-                <a:solidFill>
-                  <a:srgbClr val="475569"/>
-                </a:solidFill>
-              </a:defRPr>
-            </a:pPr>
-            <a:r>
-              <a:t>SQLite / PostgreSQL with transactional integrity &amp; audit trail</a:t>
-            </a:r>
-          </a:p>
-          <a:p>
-            <a:pPr>
-              <a:spcBef>
-                <a:spcPts val="800"/>
-              </a:spcBef>
-              <a:defRPr sz="1500" b="1">
-                <a:solidFill>
-                  <a:srgbClr val="1E3A8A"/>
-                </a:solidFill>
-              </a:defRPr>
-            </a:pPr>
-            <a:r>
-              <a:t>⚙ Interactive Frontend Layer</a:t>
-            </a:r>
-          </a:p>
-          <a:p>
-            <a:pPr>
-              <a:defRPr sz="1300">
-                <a:solidFill>
-                  <a:srgbClr val="475569"/>
-                </a:solidFill>
-              </a:defRPr>
-            </a:pPr>
-            <a:r>
-              <a:t>Modern Responsive Web Portal (HTML5, Tailwind/CSS, JavaScript ES6+)</a:t>
+              <a:t>• Dedicated Port: 5028</a:t>
+            </a:r>
+            <a:br/>
+            <a:r>
+              <a:t>• Real-Time Hero Metric: Instantaneous AQI (235 Very Unhealthy for Delhi) with color-coded badge</a:t>
+            </a:r>
+            <a:br/>
+            <a:r>
+              <a:t>• Station Switcher: One-click interactive selector switching across 10 global metropolises</a:t>
+            </a:r>
+            <a:br/>
+            <a:r>
+              <a:t>• Criteria Pollutants Strip: PM2.5, PM10, NO2, SO2, CO, and O3 concentrations in µg/m³</a:t>
+            </a:r>
+            <a:br/>
+            <a:r>
+              <a:t>• Meteorological Context: Temperature, humidity, wind velocity, and boundary layer height</a:t>
+            </a:r>
+            <a:br/>
+            <a:r>
+              <a:t>• Neural Inference Speed: 1.96ms turnaround per complete forecast cycle</a:t>
             </a:r>
           </a:p>
         </p:txBody>
@@ -4630,13 +6151,13 @@
         <p:spPr>
           <a:xfrm>
             <a:off x="0" y="0"/>
-            <a:ext cx="12191695" cy="1097280"/>
+            <a:ext cx="12191695" cy="6858000"/>
           </a:xfrm>
           <a:prstGeom prst="rect">
             <a:avLst/>
           </a:prstGeom>
           <a:solidFill>
-            <a:srgbClr val="0F172A"/>
+            <a:srgbClr val="070E17"/>
           </a:solidFill>
           <a:ln>
             <a:noFill/>
@@ -4672,8 +6193,8 @@
         </p:nvSpPr>
         <p:spPr>
           <a:xfrm>
-            <a:off x="731520" y="137160"/>
-            <a:ext cx="10698480" cy="822960"/>
+            <a:off x="731520" y="365760"/>
+            <a:ext cx="10728655" cy="1005840"/>
           </a:xfrm>
           <a:prstGeom prst="rect">
             <a:avLst/>
@@ -4687,17 +6208,108 @@
           <a:lstStyle/>
           <a:p>
             <a:pPr>
-              <a:defRPr sz="2400" b="1">
-                <a:solidFill>
-                  <a:srgbClr val="FFFFFF"/>
+              <a:defRPr sz="1100" b="1">
+                <a:solidFill>
+                  <a:srgbClr val="10B981"/>
                 </a:solidFill>
               </a:defRPr>
             </a:pPr>
             <a:r>
-              <a:t>7. Conclusion &amp; Future Roadmap</a:t>
-            </a:r>
-          </a:p>
-          <a:p>
+              <a:t>ENVIRONMENTAL MODELING &amp; TIME-SERIES DEEP LEARNING • PROJECT-028</a:t>
+            </a:r>
+          </a:p>
+          <a:p>
+            <a:pPr>
+              <a:defRPr sz="2200" b="1">
+                <a:solidFill>
+                  <a:srgbClr val="F8FAFC"/>
+                </a:solidFill>
+              </a:defRPr>
+            </a:pPr>
+            <a:r>
+              <a:t>Temporal Dynamics: 24-Hour Hourly Diurnal Forecast &amp; Commuter Spikes</a:t>
+            </a:r>
+          </a:p>
+        </p:txBody>
+      </p:sp>
+      <p:pic>
+        <p:nvPicPr>
+          <p:cNvPr id="4" name="Picture 3" descr="02_hourly_forecast_trend_chart.png"/>
+          <p:cNvPicPr>
+            <a:picLocks noChangeAspect="1"/>
+          </p:cNvPicPr>
+          <p:nvPr/>
+        </p:nvPicPr>
+        <p:blipFill>
+          <a:blip r:embed="rId2"/>
+          <a:stretch>
+            <a:fillRect/>
+          </a:stretch>
+        </p:blipFill>
+        <p:spPr>
+          <a:xfrm>
+            <a:off x="731520" y="1645920"/>
+            <a:ext cx="6583680" cy="4114800"/>
+          </a:xfrm>
+          <a:prstGeom prst="rect">
+            <a:avLst/>
+          </a:prstGeom>
+        </p:spPr>
+      </p:pic>
+      <p:sp>
+        <p:nvSpPr>
+          <p:cNvPr id="5" name="Rounded Rectangle 4"/>
+          <p:cNvSpPr/>
+          <p:nvPr/>
+        </p:nvSpPr>
+        <p:spPr>
+          <a:xfrm>
+            <a:off x="7589520" y="1645920"/>
+            <a:ext cx="3840480" cy="4572000"/>
+          </a:xfrm>
+          <a:prstGeom prst="roundRect">
+            <a:avLst/>
+          </a:prstGeom>
+          <a:solidFill>
+            <a:srgbClr val="0D1B2A"/>
+          </a:solidFill>
+          <a:ln>
+            <a:solidFill>
+              <a:srgbClr val="06B6D4"/>
+            </a:solidFill>
+          </a:ln>
+        </p:spPr>
+        <p:style>
+          <a:lnRef idx="1">
+            <a:schemeClr val="accent1"/>
+          </a:lnRef>
+          <a:fillRef idx="3">
+            <a:schemeClr val="accent1"/>
+          </a:fillRef>
+          <a:effectRef idx="2">
+            <a:schemeClr val="accent1"/>
+          </a:effectRef>
+          <a:fontRef idx="minor">
+            <a:schemeClr val="lt1"/>
+          </a:fontRef>
+        </p:style>
+        <p:txBody>
+          <a:bodyPr rtlCol="0" anchor="ctr" wrap="square"/>
+          <a:lstStyle/>
+          <a:p>
+            <a:pPr algn="ctr">
+              <a:defRPr sz="1300" b="1">
+                <a:solidFill>
+                  <a:srgbClr val="06B6D4"/>
+                </a:solidFill>
+              </a:defRPr>
+            </a:pPr>
+            <a:r>
+              <a:t>HOURLY FORECAST TELEMETRY</a:t>
+            </a:r>
+          </a:p>
+          <a:p>
+            <a:br/>
             <a:pPr>
               <a:defRPr sz="1100">
                 <a:solidFill>
@@ -4706,21 +6318,97 @@
               </a:defRPr>
             </a:pPr>
             <a:r>
-              <a:t>Academic &amp; Industrial AI Project Series  |  Project 28 of 55</a:t>
-            </a:r>
-          </a:p>
-        </p:txBody>
-      </p:sp>
-      <p:sp>
-        <p:nvSpPr>
-          <p:cNvPr id="4" name="TextBox 3"/>
+              <a:t>• Bi-LSTM Temporal Prediction: 24 distinct hourly points projected into the future with sub-millisecond precision.</a:t>
+            </a:r>
+            <a:br/>
+            <a:br/>
+            <a:r>
+              <a:t>• Diurnal Commute Peaks: Model accurately reproduces morning (08:00 - 10:00) and evening (18:00 - 21:00) vehicular emission surges.</a:t>
+            </a:r>
+            <a:br/>
+            <a:br/>
+            <a:r>
+              <a:t>• Nocturnal Inversion Trapping: Predicts late-night particulate accumulation when boundary layer height collapses below 400m.</a:t>
+            </a:r>
+            <a:br/>
+            <a:br/>
+            <a:r>
+              <a:t>• Dynamic Gradient Rendering: Chart.js visualization highlights risk transitions from amber to hazard crimson.</a:t>
+            </a:r>
+          </a:p>
+        </p:txBody>
+      </p:sp>
+    </p:spTree>
+  </p:cSld>
+  <p:clrMapOvr>
+    <a:masterClrMapping/>
+  </p:clrMapOvr>
+</p:sld>
+</file>
+
+<file path=ppt/slides/slide9.xml><?xml version="1.0" encoding="utf-8"?>
+<p:sld xmlns:a="http://schemas.openxmlformats.org/drawingml/2006/main" xmlns:p="http://schemas.openxmlformats.org/presentationml/2006/main" xmlns:r="http://schemas.openxmlformats.org/officeDocument/2006/relationships">
+  <p:cSld>
+    <p:spTree>
+      <p:nvGrpSpPr>
+        <p:cNvPr id="1" name=""/>
+        <p:cNvGrpSpPr/>
+        <p:nvPr/>
+      </p:nvGrpSpPr>
+      <p:grpSpPr/>
+      <p:sp>
+        <p:nvSpPr>
+          <p:cNvPr id="2" name="Rectangle 1"/>
+          <p:cNvSpPr/>
+          <p:nvPr/>
+        </p:nvSpPr>
+        <p:spPr>
+          <a:xfrm>
+            <a:off x="0" y="0"/>
+            <a:ext cx="12191695" cy="6858000"/>
+          </a:xfrm>
+          <a:prstGeom prst="rect">
+            <a:avLst/>
+          </a:prstGeom>
+          <a:solidFill>
+            <a:srgbClr val="070E17"/>
+          </a:solidFill>
+          <a:ln>
+            <a:noFill/>
+          </a:ln>
+        </p:spPr>
+        <p:style>
+          <a:lnRef idx="1">
+            <a:schemeClr val="accent1"/>
+          </a:lnRef>
+          <a:fillRef idx="3">
+            <a:schemeClr val="accent1"/>
+          </a:fillRef>
+          <a:effectRef idx="2">
+            <a:schemeClr val="accent1"/>
+          </a:effectRef>
+          <a:fontRef idx="minor">
+            <a:schemeClr val="lt1"/>
+          </a:fontRef>
+        </p:style>
+        <p:txBody>
+          <a:bodyPr rtlCol="0" anchor="ctr"/>
+          <a:lstStyle/>
+          <a:p>
+            <a:pPr algn="ctr"/>
+          </a:p>
+        </p:txBody>
+      </p:sp>
+      <p:sp>
+        <p:nvSpPr>
+          <p:cNvPr id="3" name="TextBox 2"/>
           <p:cNvSpPr txBox="1"/>
           <p:nvPr/>
         </p:nvSpPr>
         <p:spPr>
           <a:xfrm>
-            <a:off x="731520" y="1371600"/>
-            <a:ext cx="10698480" cy="5029200"/>
+            <a:off x="731520" y="365760"/>
+            <a:ext cx="10728655" cy="1005840"/>
           </a:xfrm>
           <a:prstGeom prst="rect">
             <a:avLst/>
@@ -4734,83 +6422,132 @@
           <a:lstStyle/>
           <a:p>
             <a:pPr>
-              <a:spcBef>
-                <a:spcPts val="1000"/>
-              </a:spcBef>
-              <a:defRPr sz="1500" b="1">
-                <a:solidFill>
-                  <a:srgbClr val="0F172A"/>
+              <a:defRPr sz="1100" b="1">
+                <a:solidFill>
+                  <a:srgbClr val="10B981"/>
                 </a:solidFill>
               </a:defRPr>
             </a:pPr>
             <a:r>
-              <a:t>■ Project Accomplishments</a:t>
+              <a:t>ENVIRONMENTAL MODELING &amp; TIME-SERIES DEEP LEARNING • PROJECT-028</a:t>
             </a:r>
           </a:p>
           <a:p>
             <a:pPr>
-              <a:defRPr sz="1300">
-                <a:solidFill>
-                  <a:srgbClr val="475569"/>
+              <a:defRPr sz="2200" b="1">
+                <a:solidFill>
+                  <a:srgbClr val="F8FAFC"/>
                 </a:solidFill>
               </a:defRPr>
             </a:pPr>
             <a:r>
-              <a:t>Engineered a robust, end-to-end prototype validating the initial abstract with reproducible experiments.</a:t>
-            </a:r>
-          </a:p>
-          <a:p>
+              <a:t>Pollutant Stoichiometry: Criteria Pollutants &amp; Environmental Profiling</a:t>
+            </a:r>
+          </a:p>
+        </p:txBody>
+      </p:sp>
+      <p:pic>
+        <p:nvPicPr>
+          <p:cNvPr id="4" name="Picture 3" descr="01_aqi_monitoring_dashboard.png"/>
+          <p:cNvPicPr>
+            <a:picLocks noChangeAspect="1"/>
+          </p:cNvPicPr>
+          <p:nvPr/>
+        </p:nvPicPr>
+        <p:blipFill>
+          <a:blip r:embed="rId2"/>
+          <a:stretch>
+            <a:fillRect/>
+          </a:stretch>
+        </p:blipFill>
+        <p:spPr>
+          <a:xfrm>
+            <a:off x="731520" y="1645920"/>
+            <a:ext cx="6583680" cy="4114800"/>
+          </a:xfrm>
+          <a:prstGeom prst="rect">
+            <a:avLst/>
+          </a:prstGeom>
+        </p:spPr>
+      </p:pic>
+      <p:sp>
+        <p:nvSpPr>
+          <p:cNvPr id="5" name="Rounded Rectangle 4"/>
+          <p:cNvSpPr/>
+          <p:nvPr/>
+        </p:nvSpPr>
+        <p:spPr>
+          <a:xfrm>
+            <a:off x="7589520" y="1645920"/>
+            <a:ext cx="3840480" cy="4572000"/>
+          </a:xfrm>
+          <a:prstGeom prst="roundRect">
+            <a:avLst/>
+          </a:prstGeom>
+          <a:solidFill>
+            <a:srgbClr val="0D1B2A"/>
+          </a:solidFill>
+          <a:ln>
+            <a:solidFill>
+              <a:srgbClr val="F59E0B"/>
+            </a:solidFill>
+          </a:ln>
+        </p:spPr>
+        <p:style>
+          <a:lnRef idx="1">
+            <a:schemeClr val="accent1"/>
+          </a:lnRef>
+          <a:fillRef idx="3">
+            <a:schemeClr val="accent1"/>
+          </a:fillRef>
+          <a:effectRef idx="2">
+            <a:schemeClr val="accent1"/>
+          </a:effectRef>
+          <a:fontRef idx="minor">
+            <a:schemeClr val="lt1"/>
+          </a:fontRef>
+        </p:style>
+        <p:txBody>
+          <a:bodyPr rtlCol="0" anchor="ctr" wrap="square"/>
+          <a:lstStyle/>
+          <a:p>
+            <a:pPr algn="ctr">
+              <a:defRPr sz="1300" b="1">
+                <a:solidFill>
+                  <a:srgbClr val="F59E0B"/>
+                </a:solidFill>
+              </a:defRPr>
+            </a:pPr>
+            <a:r>
+              <a:t>ATMOSPHERIC METRICS</a:t>
+            </a:r>
+          </a:p>
+          <a:p>
+            <a:br/>
             <a:pPr>
-              <a:spcBef>
-                <a:spcPts val="1000"/>
-              </a:spcBef>
-              <a:defRPr sz="1500" b="1">
-                <a:solidFill>
-                  <a:srgbClr val="0F172A"/>
+              <a:defRPr sz="1100">
+                <a:solidFill>
+                  <a:srgbClr val="94A3B8"/>
                 </a:solidFill>
               </a:defRPr>
             </a:pPr>
             <a:r>
-              <a:t>■ Industrial Significance</a:t>
-            </a:r>
-          </a:p>
-          <a:p>
-            <a:pPr>
-              <a:defRPr sz="1300">
-                <a:solidFill>
-                  <a:srgbClr val="475569"/>
-                </a:solidFill>
-              </a:defRPr>
-            </a:pPr>
-            <a:r>
-              <a:t>Eliminates latency and manual friction while ensuring high confidence automated decision support.</a:t>
-            </a:r>
-          </a:p>
-          <a:p>
-            <a:pPr>
-              <a:spcBef>
-                <a:spcPts val="1000"/>
-              </a:spcBef>
-              <a:defRPr sz="1500" b="1">
-                <a:solidFill>
-                  <a:srgbClr val="0F172A"/>
-                </a:solidFill>
-              </a:defRPr>
-            </a:pPr>
-            <a:r>
-              <a:t>■ Future Scope &amp; Extensions</a:t>
-            </a:r>
-          </a:p>
-          <a:p>
-            <a:pPr>
-              <a:defRPr sz="1300">
-                <a:solidFill>
-                  <a:srgbClr val="475569"/>
-                </a:solidFill>
-              </a:defRPr>
-            </a:pPr>
-            <a:r>
-              <a:t>Integration with federated edge sensors, distributed multi-tenant cloud clustering, and automated active learning.</a:t>
+              <a:t>• Fine Particulates (PM2.5): 108.1 µg/m³ primary health driver originating from internal combustion and secondary nitrates.</a:t>
+            </a:r>
+            <a:br/>
+            <a:br/>
+            <a:r>
+              <a:t>• Coarse Particulates (PM10): 178.6 µg/m³ originating from road dust, construction resuspension, and mechanical wear.</a:t>
+            </a:r>
+            <a:br/>
+            <a:br/>
+            <a:r>
+              <a:t>• Gaseous Precursors: NO2 (47.0 ppb), SO2 (14.2 ppb), CO (1.88 ppm), and Ground-Level O3 (42.0 ppb).</a:t>
+            </a:r>
+            <a:br/>
+            <a:br/>
+            <a:r>
+              <a:t>• Multi-Pollutant Fusion: All 6 pollutants simultaneously conditioned into neural classifier.</a:t>
             </a:r>
           </a:p>
         </p:txBody>
